--- a/curso/pptx/S80.pptx
+++ b/curso/pptx/S80.pptx
@@ -3799,7 +3799,7 @@
                 </a:solidFill>
                 <a:latin typeface="Nunito Sans"/>
               </a:rPr>
-              <a:t>Aitor vive con su madre y su abuela. En clase oye: «Las familias normales son padre, madre e hijos». Se siente raro. (Ejemplo inventado.)</a:t>
+              <a:t>Un chico vive con su madre y su abuela. En clase oye: «Las familias normales son padre, madre e hijos». Se siente raro. (Ejemplo inventado.)</a:t>
             </a:r>
           </a:p>
         </p:txBody>
@@ -3940,7 +3940,7 @@
                 </a:solidFill>
                 <a:latin typeface="Nunito Sans"/>
               </a:rPr>
-              <a:t>Conclusión: la familia de Aitor no es menos familia. Hay cuidado y hay vínculo.</a:t>
+              <a:t>Conclusión: la familia de ese chico no es menos familia. Hay cuidado y hay vínculo.</a:t>
             </a:r>
           </a:p>
         </p:txBody>
@@ -4126,7 +4126,7 @@
                 </a:solidFill>
                 <a:latin typeface="Nunito Sans"/>
               </a:rPr>
-              <a:t>Dylan vive con su madre, la pareja de ella y las dos hijas de esa pareja. Discuten por el baño y por el mando de la tele. (Ejemplo inventado.)</a:t>
+              <a:t>Un chico vive con su madre, la pareja de ella y las dos hijas de esa pareja. Discuten por el baño y por el mando de la tele. (Ejemplo inventado.)</a:t>
             </a:r>
           </a:p>
         </p:txBody>
@@ -4935,7 +4935,7 @@
                 </a:solidFill>
                 <a:latin typeface="Nunito Sans"/>
               </a:rPr>
-              <a:t>En la clase de Kevin, la mayoría vive con su padre y su madre. Kevin concluye: «Esa es la familia normal, y las demás no». (Ejemplo inventado.)</a:t>
+              <a:t>En la clase de un chico, la mayoría vive con su padre y su madre. Ese chico concluye: «Esa es la familia normal, y las demás no». (Ejemplo inventado.)</a:t>
             </a:r>
           </a:p>
         </p:txBody>
@@ -5094,7 +5094,7 @@
                 </a:solidFill>
                 <a:latin typeface="Nunito Sans"/>
               </a:rPr>
-              <a:t>Que algo sea frecuente no dice que sea mejor. Kevin salta de un sentido a otro sin darse cuenta.</a:t>
+              <a:t>Que algo sea frecuente no dice que sea mejor. Ese chico salta de un sentido a otro sin darse cuenta.</a:t>
             </a:r>
           </a:p>
           <a:p>

--- a/curso/pptx/S80.pptx
+++ b/curso/pptx/S80.pptx
@@ -22,6 +22,7 @@
     <p:sldId id="270" r:id="rId22"/>
     <p:sldId id="271" r:id="rId23"/>
     <p:sldId id="272" r:id="rId24"/>
+    <p:sldId id="273" r:id="rId25"/>
   </p:sldIdLst>
   <p:sldSz cx="12192000" cy="6858000" type="screen4x3"/>
   <p:notesSz cx="6858000" cy="9144000"/>
@@ -3535,7 +3536,7 @@
                 </a:solidFill>
                 <a:latin typeface="Nunito Sans"/>
               </a:rPr>
-              <a:t>PENSAMIENTO CRÍTICO · SESIÓN 80 · UNIDAD 17 · AMISTAD, AMOR Y FAMILIAS</a:t>
+              <a:t>PENSAMIENTO CRÍTICO · SESIÓN 80 · UNIDAD 17 · DIFERENTES, PERO IGUALES</a:t>
             </a:r>
           </a:p>
         </p:txBody>
@@ -3574,7 +3575,7 @@
                 </a:solidFill>
                 <a:latin typeface="Fredoka"/>
               </a:rPr>
-              <a:t>Familias diversas</a:t>
+              <a:t>Diversidad y respeto</a:t>
             </a:r>
           </a:p>
         </p:txBody>
@@ -3613,7 +3614,7 @@
                 </a:solidFill>
                 <a:latin typeface="Nunito Sans"/>
               </a:rPr>
-              <a:t>Hay muchos modelos de familia; lo común es el cuidado y el vínculo. Tomar la mía como «la normal» es generalizar deprisa.</a:t>
+              <a:t>Las personas son diversas en su orientación y su identidad; respetar es no burlarse ni excluir, y en las relaciones solo sí es sí.</a:t>
             </a:r>
           </a:p>
         </p:txBody>
@@ -3632,7 +3633,7 @@
     <p:bg>
       <p:bgPr>
         <a:solidFill>
-          <a:srgbClr val="FBF7EF"/>
+          <a:srgbClr val="1F2A44"/>
         </a:solidFill>
         <a:effectLst/>
       </p:bgPr>
@@ -3652,8 +3653,8 @@
         </p:nvSpPr>
         <p:spPr>
           <a:xfrm>
-            <a:off x="640000" y="380000"/>
-            <a:ext cx="10912000" cy="420000"/>
+            <a:off x="640000" y="2300000"/>
+            <a:ext cx="10912000" cy="500000"/>
           </a:xfrm>
           <a:prstGeom prst="rect">
             <a:avLst/>
@@ -3668,17 +3669,17 @@
           <a:p>
             <a:pPr>
               <a:spcAft>
-                <a:spcPts val="630"/>
-              </a:spcAft>
-            </a:pPr>
-            <a:r>
-              <a:rPr sz="1400" b="1">
-                <a:solidFill>
-                  <a:srgbClr val="E8793A"/>
-                </a:solidFill>
-                <a:latin typeface="Nunito Sans"/>
-              </a:rPr>
-              <a:t>BLOQUE 2 · CASOS RESUELTOS</a:t>
+                <a:spcPts val="810"/>
+              </a:spcAft>
+            </a:pPr>
+            <a:r>
+              <a:rPr sz="1800" b="1">
+                <a:solidFill>
+                  <a:srgbClr val="F4B183"/>
+                </a:solidFill>
+                <a:latin typeface="Nunito Sans"/>
+              </a:rPr>
+              <a:t>BLOQUE 2</a:t>
             </a:r>
           </a:p>
         </p:txBody>
@@ -3691,7 +3692,7 @@
         </p:nvSpPr>
         <p:spPr>
           <a:xfrm>
-            <a:off x="640000" y="760000"/>
+            <a:off x="640000" y="2800000"/>
             <a:ext cx="10912000" cy="800000"/>
           </a:xfrm>
           <a:prstGeom prst="rect">
@@ -3707,240 +3708,17 @@
           <a:p>
             <a:pPr>
               <a:spcAft>
-                <a:spcPts val="1710"/>
-              </a:spcAft>
-            </a:pPr>
-            <a:r>
-              <a:rPr sz="3800" b="1">
-                <a:solidFill>
-                  <a:srgbClr val="1F2A44"/>
+                <a:spcPts val="2160"/>
+              </a:spcAft>
+            </a:pPr>
+            <a:r>
+              <a:rPr sz="4800" b="1">
+                <a:solidFill>
+                  <a:srgbClr val="FBF7EF"/>
                 </a:solidFill>
                 <a:latin typeface="Fredoka"/>
               </a:rPr>
-              <a:t>Caso 1 · «Las familias normales»</a:t>
-            </a:r>
-          </a:p>
-        </p:txBody>
-      </p:sp>
-      <p:sp>
-        <p:nvSpPr>
-          <p:cNvPr id="4" name="Rectangle 3"/>
-          <p:cNvSpPr/>
-          <p:nvPr/>
-        </p:nvSpPr>
-        <p:spPr>
-          <a:xfrm>
-            <a:off x="640000" y="1600000"/>
-            <a:ext cx="10912000" cy="1100000"/>
-          </a:xfrm>
-          <a:prstGeom prst="rect">
-            <a:avLst/>
-          </a:prstGeom>
-          <a:solidFill>
-            <a:srgbClr val="FFFFFF"/>
-          </a:solidFill>
-          <a:ln>
-            <a:noFill/>
-          </a:ln>
-        </p:spPr>
-        <p:style>
-          <a:lnRef idx="1">
-            <a:schemeClr val="accent1"/>
-          </a:lnRef>
-          <a:fillRef idx="3">
-            <a:schemeClr val="accent1"/>
-          </a:fillRef>
-          <a:effectRef idx="2">
-            <a:schemeClr val="accent1"/>
-          </a:effectRef>
-          <a:fontRef idx="minor">
-            <a:schemeClr val="lt1"/>
-          </a:fontRef>
-        </p:style>
-        <p:txBody>
-          <a:bodyPr rtlCol="0" anchor="ctr"/>
-          <a:lstStyle/>
-          <a:p>
-            <a:pPr algn="ctr"/>
-          </a:p>
-        </p:txBody>
-      </p:sp>
-      <p:sp>
-        <p:nvSpPr>
-          <p:cNvPr id="5" name="TextBox 4"/>
-          <p:cNvSpPr txBox="1"/>
-          <p:nvPr/>
-        </p:nvSpPr>
-        <p:spPr>
-          <a:xfrm>
-            <a:off x="840000" y="1650000"/>
-            <a:ext cx="10512000" cy="1000000"/>
-          </a:xfrm>
-          <a:prstGeom prst="rect">
-            <a:avLst/>
-          </a:prstGeom>
-          <a:noFill/>
-        </p:spPr>
-        <p:txBody>
-          <a:bodyPr wrap="square" anchor="ctr">
-            <a:spAutoFit/>
-          </a:bodyPr>
-          <a:lstStyle/>
-          <a:p>
-            <a:pPr>
-              <a:spcAft>
-                <a:spcPts val="1170"/>
-              </a:spcAft>
-            </a:pPr>
-            <a:r>
-              <a:rPr sz="2600" b="1">
-                <a:solidFill>
-                  <a:srgbClr val="1F2A44"/>
-                </a:solidFill>
-                <a:latin typeface="Nunito Sans"/>
-              </a:rPr>
-              <a:t>Un chico vive con su madre y su abuela. En clase oye: «Las familias normales son padre, madre e hijos». Se siente raro. (Ejemplo inventado.)</a:t>
-            </a:r>
-          </a:p>
-        </p:txBody>
-      </p:sp>
-      <p:sp>
-        <p:nvSpPr>
-          <p:cNvPr id="6" name="TextBox 5"/>
-          <p:cNvSpPr txBox="1"/>
-          <p:nvPr/>
-        </p:nvSpPr>
-        <p:spPr>
-          <a:xfrm>
-            <a:off x="640000" y="2900000"/>
-            <a:ext cx="10912000" cy="3500000"/>
-          </a:xfrm>
-          <a:prstGeom prst="rect">
-            <a:avLst/>
-          </a:prstGeom>
-          <a:noFill/>
-        </p:spPr>
-        <p:txBody>
-          <a:bodyPr wrap="square">
-            <a:spAutoFit/>
-          </a:bodyPr>
-          <a:lstStyle/>
-          <a:p>
-            <a:pPr>
-              <a:spcAft>
-                <a:spcPts val="1080"/>
-              </a:spcAft>
-            </a:pPr>
-            <a:r>
-              <a:rPr sz="2400" b="1">
-                <a:solidFill>
-                  <a:srgbClr val="E8793A"/>
-                </a:solidFill>
-                <a:latin typeface="Nunito Sans"/>
-              </a:rPr>
-              <a:t>1. </a:t>
-            </a:r>
-            <a:r>
-              <a:rPr sz="2400" b="0">
-                <a:solidFill>
-                  <a:srgbClr val="1F2A44"/>
-                </a:solidFill>
-                <a:latin typeface="Nunito Sans"/>
-              </a:rPr>
-              <a:t>¿Cómo lo sabe quien lo dice? Seguramente mira su casa y la de sus amigos.</a:t>
-            </a:r>
-          </a:p>
-          <a:p>
-            <a:pPr>
-              <a:spcAft>
-                <a:spcPts val="1080"/>
-              </a:spcAft>
-            </a:pPr>
-            <a:r>
-              <a:rPr sz="2400" b="1">
-                <a:solidFill>
-                  <a:srgbClr val="E8793A"/>
-                </a:solidFill>
-                <a:latin typeface="Nunito Sans"/>
-              </a:rPr>
-              <a:t>2. </a:t>
-            </a:r>
-            <a:r>
-              <a:rPr sz="2400" b="0">
-                <a:solidFill>
-                  <a:srgbClr val="1F2A44"/>
-                </a:solidFill>
-                <a:latin typeface="Nunito Sans"/>
-              </a:rPr>
-              <a:t>Pocos casos y poco variados: es una </a:t>
-            </a:r>
-            <a:r>
-              <a:rPr sz="2400" b="1">
-                <a:solidFill>
-                  <a:srgbClr val="1F2A44"/>
-                </a:solidFill>
-                <a:latin typeface="Nunito Sans"/>
-              </a:rPr>
-              <a:t>generalización apresurada</a:t>
-            </a:r>
-            <a:r>
-              <a:rPr sz="2400" b="0">
-                <a:solidFill>
-                  <a:srgbClr val="1F2A44"/>
-                </a:solidFill>
-                <a:latin typeface="Nunito Sans"/>
-              </a:rPr>
-              <a:t> (sesión 19).</a:t>
-            </a:r>
-          </a:p>
-          <a:p>
-            <a:pPr>
-              <a:spcAft>
-                <a:spcPts val="1080"/>
-              </a:spcAft>
-            </a:pPr>
-            <a:r>
-              <a:rPr sz="2400" b="1">
-                <a:solidFill>
-                  <a:srgbClr val="E8793A"/>
-                </a:solidFill>
-                <a:latin typeface="Nunito Sans"/>
-              </a:rPr>
-              <a:t>3. </a:t>
-            </a:r>
-            <a:r>
-              <a:rPr sz="2400" b="0">
-                <a:solidFill>
-                  <a:srgbClr val="1F2A44"/>
-                </a:solidFill>
-                <a:latin typeface="Nunito Sans"/>
-              </a:rPr>
-              <a:t>En cualquier instituto de Bilbao hay familias de muchos tipos.</a:t>
-            </a:r>
-          </a:p>
-          <a:p>
-            <a:pPr>
-              <a:spcAft>
-                <a:spcPts val="1080"/>
-              </a:spcAft>
-            </a:pPr>
-            <a:r>
-              <a:rPr sz="2400" b="1">
-                <a:solidFill>
-                  <a:srgbClr val="E8793A"/>
-                </a:solidFill>
-                <a:latin typeface="Nunito Sans"/>
-              </a:rPr>
-              <a:t>4. </a:t>
-            </a:r>
-            <a:r>
-              <a:rPr sz="2400" b="0">
-                <a:solidFill>
-                  <a:srgbClr val="1F2A44"/>
-                </a:solidFill>
-                <a:latin typeface="Nunito Sans"/>
-              </a:rPr>
-              <a:t>Conclusión: la familia de ese chico no es menos familia. Hay cuidado y hay vínculo.</a:t>
+              <a:t>Respeto frente a burla</a:t>
             </a:r>
           </a:p>
         </p:txBody>
@@ -4005,7 +3783,7 @@
                 </a:solidFill>
                 <a:latin typeface="Nunito Sans"/>
               </a:rPr>
-              <a:t>BLOQUE 2 · CASOS RESUELTOS</a:t>
+              <a:t>BLOQUE 2 · RESPETO FRENTE A BURLA</a:t>
             </a:r>
           </a:p>
         </p:txBody>
@@ -4044,7 +3822,7 @@
                 </a:solidFill>
                 <a:latin typeface="Fredoka"/>
               </a:rPr>
-              <a:t>Caso 2 · Discutir por el baño</a:t>
+              <a:t>LGTBIfobia</a:t>
             </a:r>
           </a:p>
         </p:txBody>
@@ -4057,14 +3835,14 @@
         </p:nvSpPr>
         <p:spPr>
           <a:xfrm>
-            <a:off x="640000" y="1600000"/>
-            <a:ext cx="10912000" cy="1100000"/>
+            <a:off x="640000" y="1650000"/>
+            <a:ext cx="10912000" cy="1150000"/>
           </a:xfrm>
           <a:prstGeom prst="rect">
             <a:avLst/>
           </a:prstGeom>
           <a:solidFill>
-            <a:srgbClr val="FFFFFF"/>
+            <a:srgbClr val="EAF0F7"/>
           </a:solidFill>
           <a:ln>
             <a:noFill/>
@@ -4100,7 +3878,7 @@
         </p:nvSpPr>
         <p:spPr>
           <a:xfrm>
-            <a:off x="840000" y="1650000"/>
+            <a:off x="840000" y="1730000"/>
             <a:ext cx="10512000" cy="1000000"/>
           </a:xfrm>
           <a:prstGeom prst="rect">
@@ -4116,17 +3894,17 @@
           <a:p>
             <a:pPr>
               <a:spcAft>
-                <a:spcPts val="1170"/>
-              </a:spcAft>
-            </a:pPr>
-            <a:r>
-              <a:rPr sz="2600" b="1">
-                <a:solidFill>
-                  <a:srgbClr val="1F2A44"/>
-                </a:solidFill>
-                <a:latin typeface="Nunito Sans"/>
-              </a:rPr>
-              <a:t>Un chico vive con su madre, la pareja de ella y las dos hijas de esa pareja. Discuten por el baño y por el mando de la tele. (Ejemplo inventado.)</a:t>
+                <a:spcPts val="1260"/>
+              </a:spcAft>
+            </a:pPr>
+            <a:r>
+              <a:rPr sz="2800" b="1">
+                <a:solidFill>
+                  <a:srgbClr val="1F2A44"/>
+                </a:solidFill>
+                <a:latin typeface="Nunito Sans"/>
+              </a:rPr>
+              <a:t>Es el rechazo, la burla o la agresión a alguien por su orientación o su identidad de género.</a:t>
             </a:r>
           </a:p>
         </p:txBody>
@@ -4139,8 +3917,8 @@
         </p:nvSpPr>
         <p:spPr>
           <a:xfrm>
-            <a:off x="640000" y="2900000"/>
-            <a:ext cx="10912000" cy="3500000"/>
+            <a:off x="640000" y="3000000"/>
+            <a:ext cx="10912000" cy="3458000"/>
           </a:xfrm>
           <a:prstGeom prst="rect">
             <a:avLst/>
@@ -4155,119 +3933,173 @@
           <a:p>
             <a:pPr>
               <a:spcAft>
-                <a:spcPts val="1080"/>
-              </a:spcAft>
-            </a:pPr>
-            <a:r>
-              <a:rPr sz="2400" b="1">
+                <a:spcPts val="1260"/>
+              </a:spcAft>
+            </a:pPr>
+            <a:r>
+              <a:rPr sz="2800" b="1">
                 <a:solidFill>
                   <a:srgbClr val="E8793A"/>
                 </a:solidFill>
                 <a:latin typeface="Nunito Sans"/>
               </a:rPr>
-              <a:t>1. </a:t>
-            </a:r>
-            <a:r>
-              <a:rPr sz="2400" b="0">
-                <a:solidFill>
-                  <a:srgbClr val="1F2A44"/>
-                </a:solidFill>
-                <a:latin typeface="Nunito Sans"/>
-              </a:rPr>
-              <a:t>Tipo de familia: </a:t>
-            </a:r>
-            <a:r>
-              <a:rPr sz="2400" b="1">
-                <a:solidFill>
-                  <a:srgbClr val="1F2A44"/>
-                </a:solidFill>
-                <a:latin typeface="Nunito Sans"/>
-              </a:rPr>
-              <a:t>reconstituida</a:t>
-            </a:r>
-            <a:r>
-              <a:rPr sz="2400" b="0">
-                <a:solidFill>
-                  <a:srgbClr val="1F2A44"/>
-                </a:solidFill>
-                <a:latin typeface="Nunito Sans"/>
-              </a:rPr>
-              <a:t>.</a:t>
-            </a:r>
-          </a:p>
-          <a:p>
-            <a:pPr>
-              <a:spcAft>
-                <a:spcPts val="1080"/>
-              </a:spcAft>
-            </a:pPr>
-            <a:r>
-              <a:rPr sz="2400" b="1">
+              <a:t>• </a:t>
+            </a:r>
+            <a:r>
+              <a:rPr sz="2800" b="1">
+                <a:solidFill>
+                  <a:srgbClr val="1F2A44"/>
+                </a:solidFill>
+                <a:latin typeface="Nunito Sans"/>
+              </a:rPr>
+              <a:t>LGTBI:</a:t>
+            </a:r>
+            <a:r>
+              <a:rPr sz="2800" b="0">
+                <a:solidFill>
+                  <a:srgbClr val="1F2A44"/>
+                </a:solidFill>
+                <a:latin typeface="Nunito Sans"/>
+              </a:rPr>
+              <a:t> lesbianas, gais, trans, bisexuales e intersexuales</a:t>
+            </a:r>
+          </a:p>
+          <a:p>
+            <a:pPr>
+              <a:spcAft>
+                <a:spcPts val="1260"/>
+              </a:spcAft>
+            </a:pPr>
+            <a:r>
+              <a:rPr sz="2800" b="1">
                 <a:solidFill>
                   <a:srgbClr val="E8793A"/>
                 </a:solidFill>
                 <a:latin typeface="Nunito Sans"/>
               </a:rPr>
-              <a:t>2. </a:t>
-            </a:r>
-            <a:r>
-              <a:rPr sz="2400" b="0">
-                <a:solidFill>
-                  <a:srgbClr val="1F2A44"/>
-                </a:solidFill>
-                <a:latin typeface="Nunito Sans"/>
-              </a:rPr>
-              <a:t>¿Discutir significa que no es una familia de verdad? No: en todas las familias hay conflictos.</a:t>
-            </a:r>
-          </a:p>
-          <a:p>
-            <a:pPr>
-              <a:spcAft>
-                <a:spcPts val="1080"/>
-              </a:spcAft>
-            </a:pPr>
-            <a:r>
-              <a:rPr sz="2400" b="1">
+              <a:t>• </a:t>
+            </a:r>
+            <a:r>
+              <a:rPr sz="2800" b="1">
+                <a:solidFill>
+                  <a:srgbClr val="1F2A44"/>
+                </a:solidFill>
+                <a:latin typeface="Nunito Sans"/>
+              </a:rPr>
+              <a:t>Intersexual:</a:t>
+            </a:r>
+            <a:r>
+              <a:rPr sz="2800" b="0">
+                <a:solidFill>
+                  <a:srgbClr val="1F2A44"/>
+                </a:solidFill>
+                <a:latin typeface="Nunito Sans"/>
+              </a:rPr>
+              <a:t> cuerpo no del todo típico de hombre ni de mujer</a:t>
+            </a:r>
+          </a:p>
+          <a:p>
+            <a:pPr>
+              <a:spcAft>
+                <a:spcPts val="1260"/>
+              </a:spcAft>
+            </a:pPr>
+            <a:r>
+              <a:rPr sz="2800" b="1">
                 <a:solidFill>
                   <a:srgbClr val="E8793A"/>
                 </a:solidFill>
                 <a:latin typeface="Nunito Sans"/>
               </a:rPr>
-              <a:t>3. </a:t>
-            </a:r>
-            <a:r>
-              <a:rPr sz="2400" b="0">
-                <a:solidFill>
-                  <a:srgbClr val="1F2A44"/>
-                </a:solidFill>
-                <a:latin typeface="Nunito Sans"/>
-              </a:rPr>
-              <a:t>Lo importante es cómo se resuelven: hablar, normas claras y respeto.</a:t>
-            </a:r>
-          </a:p>
-          <a:p>
-            <a:pPr>
-              <a:spcAft>
-                <a:spcPts val="1080"/>
-              </a:spcAft>
-            </a:pPr>
-            <a:r>
-              <a:rPr sz="2400" b="1">
+              <a:t>• </a:t>
+            </a:r>
+            <a:r>
+              <a:rPr sz="2800" b="0">
+                <a:solidFill>
+                  <a:srgbClr val="1F2A44"/>
+                </a:solidFill>
+                <a:latin typeface="Nunito Sans"/>
+              </a:rPr>
+              <a:t>Es una forma de </a:t>
+            </a:r>
+            <a:r>
+              <a:rPr sz="2800" b="1">
+                <a:solidFill>
+                  <a:srgbClr val="1F2A44"/>
+                </a:solidFill>
+                <a:latin typeface="Nunito Sans"/>
+              </a:rPr>
+              <a:t>exclusión</a:t>
+            </a:r>
+            <a:r>
+              <a:rPr sz="2800" b="0">
+                <a:solidFill>
+                  <a:srgbClr val="1F2A44"/>
+                </a:solidFill>
+                <a:latin typeface="Nunito Sans"/>
+              </a:rPr>
+              <a:t>: dejar a alguien fuera</a:t>
+            </a:r>
+          </a:p>
+          <a:p>
+            <a:pPr>
+              <a:spcAft>
+                <a:spcPts val="1260"/>
+              </a:spcAft>
+            </a:pPr>
+            <a:r>
+              <a:rPr sz="2800" b="1">
                 <a:solidFill>
                   <a:srgbClr val="E8793A"/>
                 </a:solidFill>
                 <a:latin typeface="Nunito Sans"/>
               </a:rPr>
-              <a:t>4. </a:t>
-            </a:r>
-            <a:r>
-              <a:rPr sz="2400" b="0">
-                <a:solidFill>
-                  <a:srgbClr val="1F2A44"/>
-                </a:solidFill>
-                <a:latin typeface="Nunito Sans"/>
-              </a:rPr>
-              <a:t>Conclusión: el conflicto no rompe la familia. Cuenta cómo se tratan.</a:t>
+              <a:t>• </a:t>
+            </a:r>
+            <a:r>
+              <a:rPr sz="2800" b="0">
+                <a:solidFill>
+                  <a:srgbClr val="1F2A44"/>
+                </a:solidFill>
+                <a:latin typeface="Nunito Sans"/>
+              </a:rPr>
+              <a:t>Como vimos en la sesión 66: «</a:t>
+            </a:r>
+            <a:r>
+              <a:rPr sz="2800" b="1">
+                <a:solidFill>
+                  <a:srgbClr val="1F2A44"/>
+                </a:solidFill>
+                <a:latin typeface="Nunito Sans"/>
+              </a:rPr>
+              <a:t>nosotros</a:t>
+            </a:r>
+            <a:r>
+              <a:rPr sz="2800" b="0">
+                <a:solidFill>
+                  <a:srgbClr val="1F2A44"/>
+                </a:solidFill>
+                <a:latin typeface="Nunito Sans"/>
+              </a:rPr>
+              <a:t>» frente a «</a:t>
+            </a:r>
+            <a:r>
+              <a:rPr sz="2800" b="1">
+                <a:solidFill>
+                  <a:srgbClr val="1F2A44"/>
+                </a:solidFill>
+                <a:latin typeface="Nunito Sans"/>
+              </a:rPr>
+              <a:t>ellos</a:t>
+            </a:r>
+            <a:r>
+              <a:rPr sz="2800" b="0">
+                <a:solidFill>
+                  <a:srgbClr val="1F2A44"/>
+                </a:solidFill>
+                <a:latin typeface="Nunito Sans"/>
+              </a:rPr>
+              <a:t>»</a:t>
             </a:r>
           </a:p>
         </p:txBody>
@@ -4332,7 +4164,7 @@
                 </a:solidFill>
                 <a:latin typeface="Nunito Sans"/>
               </a:rPr>
-              <a:t>BLOQUE 2 · CASOS RESUELTOS</a:t>
+              <a:t>BLOQUE 2 · RESPETO FRENTE A BURLA</a:t>
             </a:r>
           </a:p>
         </p:txBody>
@@ -4371,7 +4203,7 @@
                 </a:solidFill>
                 <a:latin typeface="Fredoka"/>
               </a:rPr>
-              <a:t>Pensar sobre las familias</a:t>
+              <a:t>Burla y respeto</a:t>
             </a:r>
           </a:p>
         </p:txBody>
@@ -4453,7 +4285,7 @@
                 </a:solidFill>
                 <a:latin typeface="Nunito Sans"/>
               </a:rPr>
-              <a:t>Generalizar deprisa</a:t>
+              <a:t>Burla</a:t>
             </a:r>
           </a:p>
         </p:txBody>
@@ -4501,7 +4333,7 @@
                 </a:solidFill>
                 <a:latin typeface="Nunito Sans"/>
               </a:rPr>
-              <a:t>«Mi familia es la normal»</a:t>
+              <a:t>Usar «gay» como insulto</a:t>
             </a:r>
           </a:p>
           <a:p>
@@ -4526,7 +4358,7 @@
                 </a:solidFill>
                 <a:latin typeface="Nunito Sans"/>
               </a:rPr>
-              <a:t>«En todas las casas se hace como en la mía»</a:t>
+              <a:t>Reírse de cómo viste o habla alguien</a:t>
             </a:r>
           </a:p>
           <a:p>
@@ -4551,7 +4383,32 @@
                 </a:solidFill>
                 <a:latin typeface="Nunito Sans"/>
               </a:rPr>
-              <a:t>«Las otras familias son raras»</a:t>
+              <a:t>Adivinar y contar la orientación de otro</a:t>
+            </a:r>
+          </a:p>
+          <a:p>
+            <a:pPr>
+              <a:spcAft>
+                <a:spcPts val="1170"/>
+              </a:spcAft>
+            </a:pPr>
+            <a:r>
+              <a:rPr sz="2600" b="1">
+                <a:solidFill>
+                  <a:srgbClr val="E8793A"/>
+                </a:solidFill>
+                <a:latin typeface="Nunito Sans"/>
+              </a:rPr>
+              <a:t>• </a:t>
+            </a:r>
+            <a:r>
+              <a:rPr sz="2600" b="0">
+                <a:solidFill>
+                  <a:srgbClr val="1F2A44"/>
+                </a:solidFill>
+                <a:latin typeface="Nunito Sans"/>
+              </a:rPr>
+              <a:t>«Solo era una broma»</a:t>
             </a:r>
           </a:p>
         </p:txBody>
@@ -4633,7 +4490,7 @@
                 </a:solidFill>
                 <a:latin typeface="Nunito Sans"/>
               </a:rPr>
-              <a:t>Pensar mejor</a:t>
+              <a:t>Respeto</a:t>
             </a:r>
           </a:p>
         </p:txBody>
@@ -4681,16 +4538,23 @@
                 </a:solidFill>
                 <a:latin typeface="Nunito Sans"/>
               </a:rPr>
-              <a:t>Mi familia es </a:t>
-            </a:r>
+              <a:t>Llamar a cada persona por el nombre que pide</a:t>
+            </a:r>
+          </a:p>
+          <a:p>
+            <a:pPr>
+              <a:spcAft>
+                <a:spcPts val="1170"/>
+              </a:spcAft>
+            </a:pPr>
             <a:r>
               <a:rPr sz="2600" b="1">
                 <a:solidFill>
-                  <a:srgbClr val="1F2A44"/>
-                </a:solidFill>
-                <a:latin typeface="Nunito Sans"/>
-              </a:rPr>
-              <a:t>una</a:t>
+                  <a:srgbClr val="E8793A"/>
+                </a:solidFill>
+                <a:latin typeface="Nunito Sans"/>
+              </a:rPr>
+              <a:t>• </a:t>
             </a:r>
             <a:r>
               <a:rPr sz="2600" b="0">
@@ -4699,7 +4563,7 @@
                 </a:solidFill>
                 <a:latin typeface="Nunito Sans"/>
               </a:rPr>
-              <a:t> de muchas</a:t>
+              <a:t>Tratar a todos igual en el grupo</a:t>
             </a:r>
           </a:p>
           <a:p>
@@ -4724,7 +4588,7 @@
                 </a:solidFill>
                 <a:latin typeface="Nunito Sans"/>
               </a:rPr>
-              <a:t>¿Cuántos casos he mirado? (sesión 19)</a:t>
+              <a:t>Dejar que cada uno cuente lo suyo, si quiere</a:t>
             </a:r>
           </a:p>
           <a:p>
@@ -4749,7 +4613,7 @@
                 </a:solidFill>
                 <a:latin typeface="Nunito Sans"/>
               </a:rPr>
-              <a:t>Lo común: cuidado y vínculo</a:t>
+              <a:t>No reírse con quien se burla</a:t>
             </a:r>
           </a:p>
         </p:txBody>
@@ -4763,6 +4627,315 @@
 </file>
 
 <file path=ppt/slides/slide13.xml><?xml version="1.0" encoding="utf-8"?>
+<p:sld xmlns:a="http://schemas.openxmlformats.org/drawingml/2006/main" xmlns:p="http://schemas.openxmlformats.org/presentationml/2006/main" xmlns:r="http://schemas.openxmlformats.org/officeDocument/2006/relationships">
+  <p:cSld>
+    <p:bg>
+      <p:bgPr>
+        <a:solidFill>
+          <a:srgbClr val="FBF7EF"/>
+        </a:solidFill>
+        <a:effectLst/>
+      </p:bgPr>
+    </p:bg>
+    <p:spTree>
+      <p:nvGrpSpPr>
+        <p:cNvPr id="1" name=""/>
+        <p:cNvGrpSpPr/>
+        <p:nvPr/>
+      </p:nvGrpSpPr>
+      <p:grpSpPr/>
+      <p:sp>
+        <p:nvSpPr>
+          <p:cNvPr id="2" name="TextBox 1"/>
+          <p:cNvSpPr txBox="1"/>
+          <p:nvPr/>
+        </p:nvSpPr>
+        <p:spPr>
+          <a:xfrm>
+            <a:off x="640000" y="380000"/>
+            <a:ext cx="10912000" cy="420000"/>
+          </a:xfrm>
+          <a:prstGeom prst="rect">
+            <a:avLst/>
+          </a:prstGeom>
+          <a:noFill/>
+        </p:spPr>
+        <p:txBody>
+          <a:bodyPr wrap="square">
+            <a:spAutoFit/>
+          </a:bodyPr>
+          <a:lstStyle/>
+          <a:p>
+            <a:pPr>
+              <a:spcAft>
+                <a:spcPts val="630"/>
+              </a:spcAft>
+            </a:pPr>
+            <a:r>
+              <a:rPr sz="1400" b="1">
+                <a:solidFill>
+                  <a:srgbClr val="E8793A"/>
+                </a:solidFill>
+                <a:latin typeface="Nunito Sans"/>
+              </a:rPr>
+              <a:t>BLOQUE 2 · RESPETO FRENTE A BURLA</a:t>
+            </a:r>
+          </a:p>
+        </p:txBody>
+      </p:sp>
+      <p:sp>
+        <p:nvSpPr>
+          <p:cNvPr id="3" name="TextBox 2"/>
+          <p:cNvSpPr txBox="1"/>
+          <p:nvPr/>
+        </p:nvSpPr>
+        <p:spPr>
+          <a:xfrm>
+            <a:off x="640000" y="760000"/>
+            <a:ext cx="10912000" cy="800000"/>
+          </a:xfrm>
+          <a:prstGeom prst="rect">
+            <a:avLst/>
+          </a:prstGeom>
+          <a:noFill/>
+        </p:spPr>
+        <p:txBody>
+          <a:bodyPr wrap="square">
+            <a:spAutoFit/>
+          </a:bodyPr>
+          <a:lstStyle/>
+          <a:p>
+            <a:pPr>
+              <a:spcAft>
+                <a:spcPts val="1710"/>
+              </a:spcAft>
+            </a:pPr>
+            <a:r>
+              <a:rPr sz="3800" b="1">
+                <a:solidFill>
+                  <a:srgbClr val="1F2A44"/>
+                </a:solidFill>
+                <a:latin typeface="Fredoka"/>
+              </a:rPr>
+              <a:t>Caso 2 · «Solo era una broma»</a:t>
+            </a:r>
+          </a:p>
+        </p:txBody>
+      </p:sp>
+      <p:sp>
+        <p:nvSpPr>
+          <p:cNvPr id="4" name="Rectangle 3"/>
+          <p:cNvSpPr/>
+          <p:nvPr/>
+        </p:nvSpPr>
+        <p:spPr>
+          <a:xfrm>
+            <a:off x="640000" y="1600000"/>
+            <a:ext cx="10912000" cy="1100000"/>
+          </a:xfrm>
+          <a:prstGeom prst="rect">
+            <a:avLst/>
+          </a:prstGeom>
+          <a:solidFill>
+            <a:srgbClr val="FFFFFF"/>
+          </a:solidFill>
+          <a:ln>
+            <a:noFill/>
+          </a:ln>
+        </p:spPr>
+        <p:style>
+          <a:lnRef idx="1">
+            <a:schemeClr val="accent1"/>
+          </a:lnRef>
+          <a:fillRef idx="3">
+            <a:schemeClr val="accent1"/>
+          </a:fillRef>
+          <a:effectRef idx="2">
+            <a:schemeClr val="accent1"/>
+          </a:effectRef>
+          <a:fontRef idx="minor">
+            <a:schemeClr val="lt1"/>
+          </a:fontRef>
+        </p:style>
+        <p:txBody>
+          <a:bodyPr rtlCol="0" anchor="ctr"/>
+          <a:lstStyle/>
+          <a:p>
+            <a:pPr algn="ctr"/>
+          </a:p>
+        </p:txBody>
+      </p:sp>
+      <p:sp>
+        <p:nvSpPr>
+          <p:cNvPr id="5" name="TextBox 4"/>
+          <p:cNvSpPr txBox="1"/>
+          <p:nvPr/>
+        </p:nvSpPr>
+        <p:spPr>
+          <a:xfrm>
+            <a:off x="840000" y="1650000"/>
+            <a:ext cx="10512000" cy="1000000"/>
+          </a:xfrm>
+          <a:prstGeom prst="rect">
+            <a:avLst/>
+          </a:prstGeom>
+          <a:noFill/>
+        </p:spPr>
+        <p:txBody>
+          <a:bodyPr wrap="square" anchor="ctr">
+            <a:spAutoFit/>
+          </a:bodyPr>
+          <a:lstStyle/>
+          <a:p>
+            <a:pPr>
+              <a:spcAft>
+                <a:spcPts val="1170"/>
+              </a:spcAft>
+            </a:pPr>
+            <a:r>
+              <a:rPr sz="2600" b="1">
+                <a:solidFill>
+                  <a:srgbClr val="1F2A44"/>
+                </a:solidFill>
+                <a:latin typeface="Nunito Sans"/>
+              </a:rPr>
+              <a:t>En el vestuario, alguien le grita «¡Qué gay eres!» a un chico por fallar un pase. Luego dice que solo era una broma.</a:t>
+            </a:r>
+          </a:p>
+        </p:txBody>
+      </p:sp>
+      <p:sp>
+        <p:nvSpPr>
+          <p:cNvPr id="6" name="TextBox 5"/>
+          <p:cNvSpPr txBox="1"/>
+          <p:nvPr/>
+        </p:nvSpPr>
+        <p:spPr>
+          <a:xfrm>
+            <a:off x="640000" y="2900000"/>
+            <a:ext cx="10912000" cy="3500000"/>
+          </a:xfrm>
+          <a:prstGeom prst="rect">
+            <a:avLst/>
+          </a:prstGeom>
+          <a:noFill/>
+        </p:spPr>
+        <p:txBody>
+          <a:bodyPr wrap="square">
+            <a:spAutoFit/>
+          </a:bodyPr>
+          <a:lstStyle/>
+          <a:p>
+            <a:pPr>
+              <a:spcAft>
+                <a:spcPts val="1080"/>
+              </a:spcAft>
+            </a:pPr>
+            <a:r>
+              <a:rPr sz="2400" b="1">
+                <a:solidFill>
+                  <a:srgbClr val="E8793A"/>
+                </a:solidFill>
+                <a:latin typeface="Nunito Sans"/>
+              </a:rPr>
+              <a:t>1. </a:t>
+            </a:r>
+            <a:r>
+              <a:rPr sz="2400" b="0">
+                <a:solidFill>
+                  <a:srgbClr val="1F2A44"/>
+                </a:solidFill>
+                <a:latin typeface="Nunito Sans"/>
+              </a:rPr>
+              <a:t>¿Qué dice la frase sin decirlo? Que ser gay es algo malo, algo de lo que reírse.</a:t>
+            </a:r>
+          </a:p>
+          <a:p>
+            <a:pPr>
+              <a:spcAft>
+                <a:spcPts val="1080"/>
+              </a:spcAft>
+            </a:pPr>
+            <a:r>
+              <a:rPr sz="2400" b="1">
+                <a:solidFill>
+                  <a:srgbClr val="E8793A"/>
+                </a:solidFill>
+                <a:latin typeface="Nunito Sans"/>
+              </a:rPr>
+              <a:t>2. </a:t>
+            </a:r>
+            <a:r>
+              <a:rPr sz="2400" b="0">
+                <a:solidFill>
+                  <a:srgbClr val="1F2A44"/>
+                </a:solidFill>
+                <a:latin typeface="Nunito Sans"/>
+              </a:rPr>
+              <a:t>¿A quién hace daño? A ese chico y a cualquier persona gay que lo oiga, aunque calle.</a:t>
+            </a:r>
+          </a:p>
+          <a:p>
+            <a:pPr>
+              <a:spcAft>
+                <a:spcPts val="1080"/>
+              </a:spcAft>
+            </a:pPr>
+            <a:r>
+              <a:rPr sz="2400" b="1">
+                <a:solidFill>
+                  <a:srgbClr val="E8793A"/>
+                </a:solidFill>
+                <a:latin typeface="Nunito Sans"/>
+              </a:rPr>
+              <a:t>3. </a:t>
+            </a:r>
+            <a:r>
+              <a:rPr sz="2400" b="0">
+                <a:solidFill>
+                  <a:srgbClr val="1F2A44"/>
+                </a:solidFill>
+                <a:latin typeface="Nunito Sans"/>
+              </a:rPr>
+              <a:t>Que todos se rían no lo hace bueno: recuerda «todo el mundo lo hace» (sesión 9).</a:t>
+            </a:r>
+          </a:p>
+          <a:p>
+            <a:pPr>
+              <a:spcAft>
+                <a:spcPts val="1080"/>
+              </a:spcAft>
+            </a:pPr>
+            <a:r>
+              <a:rPr sz="2400" b="1">
+                <a:solidFill>
+                  <a:srgbClr val="E8793A"/>
+                </a:solidFill>
+                <a:latin typeface="Nunito Sans"/>
+              </a:rPr>
+              <a:t>4. </a:t>
+            </a:r>
+            <a:r>
+              <a:rPr sz="2400" b="0">
+                <a:solidFill>
+                  <a:srgbClr val="1F2A44"/>
+                </a:solidFill>
+                <a:latin typeface="Nunito Sans"/>
+              </a:rPr>
+              <a:t>Conclusión: una broma que usa a un grupo como insulto es una burla. Y deja a ese grupo fuera.</a:t>
+            </a:r>
+          </a:p>
+        </p:txBody>
+      </p:sp>
+    </p:spTree>
+  </p:cSld>
+  <p:clrMapOvr>
+    <a:masterClrMapping/>
+  </p:clrMapOvr>
+</p:sld>
+</file>
+
+<file path=ppt/slides/slide14.xml><?xml version="1.0" encoding="utf-8"?>
 <p:sld xmlns:a="http://schemas.openxmlformats.org/drawingml/2006/main" xmlns:p="http://schemas.openxmlformats.org/presentationml/2006/main" xmlns:r="http://schemas.openxmlformats.org/officeDocument/2006/relationships">
   <p:cSld>
     <p:bg>
@@ -4814,7 +4987,7 @@
                 </a:solidFill>
                 <a:latin typeface="Nunito Sans"/>
               </a:rPr>
-              <a:t>CASO TRAMPA · BLOQUE 2 · CASOS RESUELTOS</a:t>
+              <a:t>CASO TRAMPA · BLOQUE 2 · RESPETO FRENTE A BURLA</a:t>
             </a:r>
           </a:p>
         </p:txBody>
@@ -4853,7 +5026,7 @@
                 </a:solidFill>
                 <a:latin typeface="Fredoka"/>
               </a:rPr>
-              <a:t>⚠ ¿Normal es lo más frecuente?</a:t>
+              <a:t>⚠ Se nota por fuera</a:t>
             </a:r>
           </a:p>
         </p:txBody>
@@ -4935,7 +5108,7 @@
                 </a:solidFill>
                 <a:latin typeface="Nunito Sans"/>
               </a:rPr>
-              <a:t>En la clase de un chico, la mayoría vive con su padre y su madre. Ese chico concluye: «Esa es la familia normal, y las demás no». (Ejemplo inventado.)</a:t>
+              <a:t>Un chico ve un vídeo de un cantante con las uñas pintadas y comenta: «Se nota que es gay».</a:t>
             </a:r>
           </a:p>
         </p:txBody>
@@ -4983,7 +5156,7 @@
                 </a:solidFill>
                 <a:latin typeface="Nunito Sans"/>
               </a:rPr>
-              <a:t>Si es la más frecuente, ¿es la normal?</a:t>
+              <a:t>¿Se puede saber así?</a:t>
             </a:r>
           </a:p>
           <a:p>
@@ -5008,7 +5181,7 @@
                 </a:solidFill>
                 <a:latin typeface="Nunito Sans"/>
               </a:rPr>
-              <a:t>Parece que sí: lo que más se ve es lo «normal».</a:t>
+              <a:t>Parece una pista: «los chicos no se pintan las uñas».</a:t>
             </a:r>
           </a:p>
           <a:p>
@@ -5033,7 +5206,7 @@
                 </a:solidFill>
                 <a:latin typeface="Nunito Sans"/>
               </a:rPr>
-              <a:t>Pero «normal» tiene dos sentidos: </a:t>
+              <a:t>Pero eso es un </a:t>
             </a:r>
             <a:r>
               <a:rPr sz="2400" b="1">
@@ -5042,7 +5215,7 @@
                 </a:solidFill>
                 <a:latin typeface="Nunito Sans"/>
               </a:rPr>
-              <a:t>frecuente</a:t>
+              <a:t>rol de género</a:t>
             </a:r>
             <a:r>
               <a:rPr sz="2400" b="0">
@@ -5051,16 +5224,23 @@
                 </a:solidFill>
                 <a:latin typeface="Nunito Sans"/>
               </a:rPr>
-              <a:t> (lo que más hay) y </a:t>
-            </a:r>
+              <a:t> (sesión 78). Y el rol no dice nada de la orientación.</a:t>
+            </a:r>
+          </a:p>
+          <a:p>
+            <a:pPr>
+              <a:spcAft>
+                <a:spcPts val="1080"/>
+              </a:spcAft>
+            </a:pPr>
             <a:r>
               <a:rPr sz="2400" b="1">
                 <a:solidFill>
-                  <a:srgbClr val="1F2A44"/>
-                </a:solidFill>
-                <a:latin typeface="Nunito Sans"/>
-              </a:rPr>
-              <a:t>correcto</a:t>
+                  <a:srgbClr val="E8793A"/>
+                </a:solidFill>
+                <a:latin typeface="Nunito Sans"/>
+              </a:rPr>
+              <a:t>4. </a:t>
             </a:r>
             <a:r>
               <a:rPr sz="2400" b="0">
@@ -5069,7 +5249,7 @@
                 </a:solidFill>
                 <a:latin typeface="Nunito Sans"/>
               </a:rPr>
-              <a:t> (como debe ser).</a:t>
+              <a:t>La orientación es hacia quién siente atracción alguien. No se ve en la ropa ni en las uñas: ¿cómo lo sabes?</a:t>
             </a:r>
           </a:p>
           <a:p>
@@ -5085,7 +5265,7 @@
                 </a:solidFill>
                 <a:latin typeface="Nunito Sans"/>
               </a:rPr>
-              <a:t>4. </a:t>
+              <a:t>5. </a:t>
             </a:r>
             <a:r>
               <a:rPr sz="2400" b="0">
@@ -5094,175 +5274,7 @@
                 </a:solidFill>
                 <a:latin typeface="Nunito Sans"/>
               </a:rPr>
-              <a:t>Que algo sea frecuente no dice que sea mejor. Ese chico salta de un sentido a otro sin darse cuenta.</a:t>
-            </a:r>
-          </a:p>
-          <a:p>
-            <a:pPr>
-              <a:spcAft>
-                <a:spcPts val="1080"/>
-              </a:spcAft>
-            </a:pPr>
-            <a:r>
-              <a:rPr sz="2400" b="1">
-                <a:solidFill>
-                  <a:srgbClr val="E8793A"/>
-                </a:solidFill>
-                <a:latin typeface="Nunito Sans"/>
-              </a:rPr>
-              <a:t>5. </a:t>
-            </a:r>
-            <a:r>
-              <a:rPr sz="2400" b="0">
-                <a:solidFill>
-                  <a:srgbClr val="1F2A44"/>
-                </a:solidFill>
-                <a:latin typeface="Nunito Sans"/>
-              </a:rPr>
-              <a:t>Conclusión: una familia puede ser menos frecuente e igual de familia. Ojo con las palabras de dos sentidos.</a:t>
-            </a:r>
-          </a:p>
-        </p:txBody>
-      </p:sp>
-    </p:spTree>
-  </p:cSld>
-  <p:clrMapOvr>
-    <a:masterClrMapping/>
-  </p:clrMapOvr>
-</p:sld>
-</file>
-
-<file path=ppt/slides/slide14.xml><?xml version="1.0" encoding="utf-8"?>
-<p:sld xmlns:a="http://schemas.openxmlformats.org/drawingml/2006/main" xmlns:p="http://schemas.openxmlformats.org/presentationml/2006/main" xmlns:r="http://schemas.openxmlformats.org/officeDocument/2006/relationships">
-  <p:cSld>
-    <p:bg>
-      <p:bgPr>
-        <a:solidFill>
-          <a:srgbClr val="FBF7EF"/>
-        </a:solidFill>
-        <a:effectLst/>
-      </p:bgPr>
-    </p:bg>
-    <p:spTree>
-      <p:nvGrpSpPr>
-        <p:cNvPr id="1" name=""/>
-        <p:cNvGrpSpPr/>
-        <p:nvPr/>
-      </p:nvGrpSpPr>
-      <p:grpSpPr/>
-      <p:sp>
-        <p:nvSpPr>
-          <p:cNvPr id="2" name="TextBox 1"/>
-          <p:cNvSpPr txBox="1"/>
-          <p:nvPr/>
-        </p:nvSpPr>
-        <p:spPr>
-          <a:xfrm>
-            <a:off x="640000" y="380000"/>
-            <a:ext cx="10912000" cy="420000"/>
-          </a:xfrm>
-          <a:prstGeom prst="rect">
-            <a:avLst/>
-          </a:prstGeom>
-          <a:noFill/>
-        </p:spPr>
-        <p:txBody>
-          <a:bodyPr wrap="square">
-            <a:spAutoFit/>
-          </a:bodyPr>
-          <a:lstStyle/>
-          <a:p>
-            <a:pPr>
-              <a:spcAft>
-                <a:spcPts val="630"/>
-              </a:spcAft>
-            </a:pPr>
-            <a:r>
-              <a:rPr sz="1400" b="1">
-                <a:solidFill>
-                  <a:srgbClr val="E8793A"/>
-                </a:solidFill>
-                <a:latin typeface="Nunito Sans"/>
-              </a:rPr>
-              <a:t>LO DE HOY EN TRES LÍNEAS</a:t>
-            </a:r>
-          </a:p>
-        </p:txBody>
-      </p:sp>
-      <p:sp>
-        <p:nvSpPr>
-          <p:cNvPr id="3" name="TextBox 2"/>
-          <p:cNvSpPr txBox="1"/>
-          <p:nvPr/>
-        </p:nvSpPr>
-        <p:spPr>
-          <a:xfrm>
-            <a:off x="640000" y="760000"/>
-            <a:ext cx="10912000" cy="800000"/>
-          </a:xfrm>
-          <a:prstGeom prst="rect">
-            <a:avLst/>
-          </a:prstGeom>
-          <a:noFill/>
-        </p:spPr>
-        <p:txBody>
-          <a:bodyPr wrap="square">
-            <a:spAutoFit/>
-          </a:bodyPr>
-          <a:lstStyle/>
-          <a:p>
-            <a:pPr>
-              <a:spcAft>
-                <a:spcPts val="1710"/>
-              </a:spcAft>
-            </a:pPr>
-            <a:r>
-              <a:rPr sz="3800" b="1">
-                <a:solidFill>
-                  <a:srgbClr val="1F2A44"/>
-                </a:solidFill>
-                <a:latin typeface="Fredoka"/>
-              </a:rPr>
-              <a:t>Escríbelo tú primero, sin mirar</a:t>
-            </a:r>
-          </a:p>
-        </p:txBody>
-      </p:sp>
-      <p:sp>
-        <p:nvSpPr>
-          <p:cNvPr id="4" name="TextBox 3"/>
-          <p:cNvSpPr txBox="1"/>
-          <p:nvPr/>
-        </p:nvSpPr>
-        <p:spPr>
-          <a:xfrm>
-            <a:off x="640000" y="1800000"/>
-            <a:ext cx="10912000" cy="1500000"/>
-          </a:xfrm>
-          <a:prstGeom prst="rect">
-            <a:avLst/>
-          </a:prstGeom>
-          <a:noFill/>
-        </p:spPr>
-        <p:txBody>
-          <a:bodyPr wrap="square">
-            <a:spAutoFit/>
-          </a:bodyPr>
-          <a:lstStyle/>
-          <a:p>
-            <a:pPr>
-              <a:spcAft>
-                <a:spcPts val="1170"/>
-              </a:spcAft>
-            </a:pPr>
-            <a:r>
-              <a:rPr sz="2600" b="0">
-                <a:solidFill>
-                  <a:srgbClr val="4A5568"/>
-                </a:solidFill>
-                <a:latin typeface="Nunito Sans"/>
-              </a:rPr>
-              <a:t>Dos minutos. Después lo comparamos.</a:t>
+              <a:t>Conclusión: la orientación no se adivina por la apariencia. Y además es asunto de cada persona.</a:t>
             </a:r>
           </a:p>
         </p:txBody>
@@ -5340,8 +5352,8 @@
         </p:nvSpPr>
         <p:spPr>
           <a:xfrm>
-            <a:off x="640000" y="1300000"/>
-            <a:ext cx="10912000" cy="4800000"/>
+            <a:off x="640000" y="760000"/>
+            <a:ext cx="10912000" cy="800000"/>
           </a:xfrm>
           <a:prstGeom prst="rect">
             <a:avLst/>
@@ -5356,76 +5368,56 @@
           <a:p>
             <a:pPr>
               <a:spcAft>
-                <a:spcPts val="1350"/>
-              </a:spcAft>
-            </a:pPr>
-            <a:r>
-              <a:rPr sz="3000" b="1">
-                <a:solidFill>
-                  <a:srgbClr val="E8793A"/>
-                </a:solidFill>
-                <a:latin typeface="Nunito Sans"/>
-              </a:rPr>
-              <a:t>1. </a:t>
-            </a:r>
-            <a:r>
-              <a:rPr sz="3000" b="0">
-                <a:solidFill>
-                  <a:srgbClr val="1F2A44"/>
-                </a:solidFill>
-                <a:latin typeface="Nunito Sans"/>
-              </a:rPr>
-              <a:t>Hay muchos modelos de familia: nuclear, monoparental, reconstituida, homoparental, extensa, de acogida…</a:t>
-            </a:r>
-          </a:p>
-          <a:p>
-            <a:pPr>
-              <a:spcAft>
-                <a:spcPts val="1350"/>
-              </a:spcAft>
-            </a:pPr>
-            <a:r>
-              <a:rPr sz="3000" b="1">
-                <a:solidFill>
-                  <a:srgbClr val="E8793A"/>
-                </a:solidFill>
-                <a:latin typeface="Nunito Sans"/>
-              </a:rPr>
-              <a:t>2. </a:t>
-            </a:r>
-            <a:r>
-              <a:rPr sz="3000" b="0">
-                <a:solidFill>
-                  <a:srgbClr val="1F2A44"/>
-                </a:solidFill>
-                <a:latin typeface="Nunito Sans"/>
-              </a:rPr>
-              <a:t>Lo que tienen en común es el cuidado y un vínculo que dura.</a:t>
-            </a:r>
-          </a:p>
-          <a:p>
-            <a:pPr>
-              <a:spcAft>
-                <a:spcPts val="1350"/>
-              </a:spcAft>
-            </a:pPr>
-            <a:r>
-              <a:rPr sz="3000" b="1">
-                <a:solidFill>
-                  <a:srgbClr val="E8793A"/>
-                </a:solidFill>
-                <a:latin typeface="Nunito Sans"/>
-              </a:rPr>
-              <a:t>3. </a:t>
-            </a:r>
-            <a:r>
-              <a:rPr sz="3000" b="0">
-                <a:solidFill>
-                  <a:srgbClr val="1F2A44"/>
-                </a:solidFill>
-                <a:latin typeface="Nunito Sans"/>
-              </a:rPr>
-              <a:t>Tomar mi familia como «la normal» es una generalización apresurada.</a:t>
+                <a:spcPts val="1710"/>
+              </a:spcAft>
+            </a:pPr>
+            <a:r>
+              <a:rPr sz="3800" b="1">
+                <a:solidFill>
+                  <a:srgbClr val="1F2A44"/>
+                </a:solidFill>
+                <a:latin typeface="Fredoka"/>
+              </a:rPr>
+              <a:t>Escríbelo tú primero, sin mirar</a:t>
+            </a:r>
+          </a:p>
+        </p:txBody>
+      </p:sp>
+      <p:sp>
+        <p:nvSpPr>
+          <p:cNvPr id="4" name="TextBox 3"/>
+          <p:cNvSpPr txBox="1"/>
+          <p:nvPr/>
+        </p:nvSpPr>
+        <p:spPr>
+          <a:xfrm>
+            <a:off x="640000" y="1800000"/>
+            <a:ext cx="10912000" cy="1500000"/>
+          </a:xfrm>
+          <a:prstGeom prst="rect">
+            <a:avLst/>
+          </a:prstGeom>
+          <a:noFill/>
+        </p:spPr>
+        <p:txBody>
+          <a:bodyPr wrap="square">
+            <a:spAutoFit/>
+          </a:bodyPr>
+          <a:lstStyle/>
+          <a:p>
+            <a:pPr>
+              <a:spcAft>
+                <a:spcPts val="1170"/>
+              </a:spcAft>
+            </a:pPr>
+            <a:r>
+              <a:rPr sz="2600" b="0">
+                <a:solidFill>
+                  <a:srgbClr val="4A5568"/>
+                </a:solidFill>
+                <a:latin typeface="Nunito Sans"/>
+              </a:rPr>
+              <a:t>Dos minutos. Después lo comparamos.</a:t>
             </a:r>
           </a:p>
         </p:txBody>
@@ -5444,7 +5436,7 @@
     <p:bg>
       <p:bgPr>
         <a:solidFill>
-          <a:srgbClr val="1F2A44"/>
+          <a:srgbClr val="FBF7EF"/>
         </a:solidFill>
         <a:effectLst/>
       </p:bgPr>
@@ -5486,11 +5478,11 @@
             <a:r>
               <a:rPr sz="1400" b="1">
                 <a:solidFill>
-                  <a:srgbClr val="F4B183"/>
-                </a:solidFill>
-                <a:latin typeface="Nunito Sans"/>
-              </a:rPr>
-              <a:t>VÍDEO</a:t>
+                  <a:srgbClr val="E8793A"/>
+                </a:solidFill>
+                <a:latin typeface="Nunito Sans"/>
+              </a:rPr>
+              <a:t>LO DE HOY EN TRES LÍNEAS</a:t>
             </a:r>
           </a:p>
         </p:txBody>
@@ -5503,8 +5495,8 @@
         </p:nvSpPr>
         <p:spPr>
           <a:xfrm>
-            <a:off x="640000" y="760000"/>
-            <a:ext cx="10912000" cy="800000"/>
+            <a:off x="640000" y="1300000"/>
+            <a:ext cx="10912000" cy="4800000"/>
           </a:xfrm>
           <a:prstGeom prst="rect">
             <a:avLst/>
@@ -5519,56 +5511,76 @@
           <a:p>
             <a:pPr>
               <a:spcAft>
-                <a:spcPts val="1620"/>
-              </a:spcAft>
-            </a:pPr>
-            <a:r>
-              <a:rPr sz="3600" b="1">
-                <a:solidFill>
-                  <a:srgbClr val="FBF7EF"/>
-                </a:solidFill>
-                <a:latin typeface="Fredoka"/>
-              </a:rPr>
-              <a:t>La diversidad familiar: distintos modelos de familia</a:t>
-            </a:r>
-          </a:p>
-        </p:txBody>
-      </p:sp>
-      <p:sp>
-        <p:nvSpPr>
-          <p:cNvPr id="4" name="TextBox 3"/>
-          <p:cNvSpPr txBox="1"/>
-          <p:nvPr/>
-        </p:nvSpPr>
-        <p:spPr>
-          <a:xfrm>
-            <a:off x="640000" y="2200000"/>
-            <a:ext cx="10912000" cy="2000000"/>
-          </a:xfrm>
-          <a:prstGeom prst="rect">
-            <a:avLst/>
-          </a:prstGeom>
-          <a:noFill/>
-        </p:spPr>
-        <p:txBody>
-          <a:bodyPr wrap="square">
-            <a:spAutoFit/>
-          </a:bodyPr>
-          <a:lstStyle/>
-          <a:p>
-            <a:pPr>
-              <a:spcAft>
-                <a:spcPts val="1080"/>
-              </a:spcAft>
-            </a:pPr>
-            <a:r>
-              <a:rPr sz="2400" b="0">
-                <a:solidFill>
-                  <a:srgbClr val="C9D3E6"/>
-                </a:solidFill>
-                <a:latin typeface="Nunito Sans"/>
-              </a:rPr>
-              <a:t>Ver más modelos de familia y lo que tienen en común.</a:t>
+                <a:spcPts val="1350"/>
+              </a:spcAft>
+            </a:pPr>
+            <a:r>
+              <a:rPr sz="3000" b="1">
+                <a:solidFill>
+                  <a:srgbClr val="E8793A"/>
+                </a:solidFill>
+                <a:latin typeface="Nunito Sans"/>
+              </a:rPr>
+              <a:t>1. </a:t>
+            </a:r>
+            <a:r>
+              <a:rPr sz="3000" b="0">
+                <a:solidFill>
+                  <a:srgbClr val="1F2A44"/>
+                </a:solidFill>
+                <a:latin typeface="Nunito Sans"/>
+              </a:rPr>
+              <a:t>La orientación es hacia quién sientes atracción; la identidad de género, cómo te reconoces.</a:t>
+            </a:r>
+          </a:p>
+          <a:p>
+            <a:pPr>
+              <a:spcAft>
+                <a:spcPts val="1350"/>
+              </a:spcAft>
+            </a:pPr>
+            <a:r>
+              <a:rPr sz="3000" b="1">
+                <a:solidFill>
+                  <a:srgbClr val="E8793A"/>
+                </a:solidFill>
+                <a:latin typeface="Nunito Sans"/>
+              </a:rPr>
+              <a:t>2. </a:t>
+            </a:r>
+            <a:r>
+              <a:rPr sz="3000" b="0">
+                <a:solidFill>
+                  <a:srgbClr val="1F2A44"/>
+                </a:solidFill>
+                <a:latin typeface="Nunito Sans"/>
+              </a:rPr>
+              <a:t>En las relaciones solo sí es sí, y se puede cambiar de opinión.</a:t>
+            </a:r>
+          </a:p>
+          <a:p>
+            <a:pPr>
+              <a:spcAft>
+                <a:spcPts val="1350"/>
+              </a:spcAft>
+            </a:pPr>
+            <a:r>
+              <a:rPr sz="3000" b="1">
+                <a:solidFill>
+                  <a:srgbClr val="E8793A"/>
+                </a:solidFill>
+                <a:latin typeface="Nunito Sans"/>
+              </a:rPr>
+              <a:t>3. </a:t>
+            </a:r>
+            <a:r>
+              <a:rPr sz="3000" b="0">
+                <a:solidFill>
+                  <a:srgbClr val="1F2A44"/>
+                </a:solidFill>
+                <a:latin typeface="Nunito Sans"/>
+              </a:rPr>
+              <a:t>Burlarse de alguien por su orientación o identidad es LGTBIfobia: una forma de exclusión.</a:t>
             </a:r>
           </a:p>
         </p:txBody>
@@ -5633,6 +5645,149 @@
                 </a:solidFill>
                 <a:latin typeface="Nunito Sans"/>
               </a:rPr>
+              <a:t>VÍDEO</a:t>
+            </a:r>
+          </a:p>
+        </p:txBody>
+      </p:sp>
+      <p:sp>
+        <p:nvSpPr>
+          <p:cNvPr id="3" name="TextBox 2"/>
+          <p:cNvSpPr txBox="1"/>
+          <p:nvPr/>
+        </p:nvSpPr>
+        <p:spPr>
+          <a:xfrm>
+            <a:off x="640000" y="760000"/>
+            <a:ext cx="10912000" cy="800000"/>
+          </a:xfrm>
+          <a:prstGeom prst="rect">
+            <a:avLst/>
+          </a:prstGeom>
+          <a:noFill/>
+        </p:spPr>
+        <p:txBody>
+          <a:bodyPr wrap="square">
+            <a:spAutoFit/>
+          </a:bodyPr>
+          <a:lstStyle/>
+          <a:p>
+            <a:pPr>
+              <a:spcAft>
+                <a:spcPts val="1620"/>
+              </a:spcAft>
+            </a:pPr>
+            <a:r>
+              <a:rPr sz="3600" b="1">
+                <a:solidFill>
+                  <a:srgbClr val="FBF7EF"/>
+                </a:solidFill>
+                <a:latin typeface="Fredoka"/>
+              </a:rPr>
+              <a:t>El consentimiento explicado de forma sencilla y respetuosa</a:t>
+            </a:r>
+          </a:p>
+        </p:txBody>
+      </p:sp>
+      <p:sp>
+        <p:nvSpPr>
+          <p:cNvPr id="4" name="TextBox 3"/>
+          <p:cNvSpPr txBox="1"/>
+          <p:nvPr/>
+        </p:nvSpPr>
+        <p:spPr>
+          <a:xfrm>
+            <a:off x="640000" y="2200000"/>
+            <a:ext cx="10912000" cy="2000000"/>
+          </a:xfrm>
+          <a:prstGeom prst="rect">
+            <a:avLst/>
+          </a:prstGeom>
+          <a:noFill/>
+        </p:spPr>
+        <p:txBody>
+          <a:bodyPr wrap="square">
+            <a:spAutoFit/>
+          </a:bodyPr>
+          <a:lstStyle/>
+          <a:p>
+            <a:pPr>
+              <a:spcAft>
+                <a:spcPts val="1080"/>
+              </a:spcAft>
+            </a:pPr>
+            <a:r>
+              <a:rPr sz="2400" b="0">
+                <a:solidFill>
+                  <a:srgbClr val="C9D3E6"/>
+                </a:solidFill>
+                <a:latin typeface="Nunito Sans"/>
+              </a:rPr>
+              <a:t>Ver con un ejemplo cotidiano que un sí tiene que ser libre y que se puede retirar.</a:t>
+            </a:r>
+          </a:p>
+        </p:txBody>
+      </p:sp>
+    </p:spTree>
+  </p:cSld>
+  <p:clrMapOvr>
+    <a:masterClrMapping/>
+  </p:clrMapOvr>
+</p:sld>
+</file>
+
+<file path=ppt/slides/slide18.xml><?xml version="1.0" encoding="utf-8"?>
+<p:sld xmlns:a="http://schemas.openxmlformats.org/drawingml/2006/main" xmlns:p="http://schemas.openxmlformats.org/presentationml/2006/main" xmlns:r="http://schemas.openxmlformats.org/officeDocument/2006/relationships">
+  <p:cSld>
+    <p:bg>
+      <p:bgPr>
+        <a:solidFill>
+          <a:srgbClr val="1F2A44"/>
+        </a:solidFill>
+        <a:effectLst/>
+      </p:bgPr>
+    </p:bg>
+    <p:spTree>
+      <p:nvGrpSpPr>
+        <p:cNvPr id="1" name=""/>
+        <p:cNvGrpSpPr/>
+        <p:nvPr/>
+      </p:nvGrpSpPr>
+      <p:grpSpPr/>
+      <p:sp>
+        <p:nvSpPr>
+          <p:cNvPr id="2" name="TextBox 1"/>
+          <p:cNvSpPr txBox="1"/>
+          <p:nvPr/>
+        </p:nvSpPr>
+        <p:spPr>
+          <a:xfrm>
+            <a:off x="640000" y="380000"/>
+            <a:ext cx="10912000" cy="420000"/>
+          </a:xfrm>
+          <a:prstGeom prst="rect">
+            <a:avLst/>
+          </a:prstGeom>
+          <a:noFill/>
+        </p:spPr>
+        <p:txBody>
+          <a:bodyPr wrap="square">
+            <a:spAutoFit/>
+          </a:bodyPr>
+          <a:lstStyle/>
+          <a:p>
+            <a:pPr>
+              <a:spcAft>
+                <a:spcPts val="630"/>
+              </a:spcAft>
+            </a:pPr>
+            <a:r>
+              <a:rPr sz="1400" b="1">
+                <a:solidFill>
+                  <a:srgbClr val="F4B183"/>
+                </a:solidFill>
+                <a:latin typeface="Nunito Sans"/>
+              </a:rPr>
               <a:t>AHORA, LA HOJA DEL DÍA</a:t>
             </a:r>
           </a:p>
@@ -6226,7 +6381,7 @@
                 </a:solidFill>
                 <a:latin typeface="Nunito Sans"/>
               </a:rPr>
-              <a:t>Vigilar a la pareja y presentarlo como preocupación es ______ disfrazado de cariño.  (sesión 79)</a:t>
+              <a:t>Según el INE, las mujeres dedican más horas que los hombres a la casa y a ______.  (sesión 79)</a:t>
             </a:r>
           </a:p>
           <a:p>
@@ -6251,7 +6406,7 @@
                 </a:solidFill>
                 <a:latin typeface="Nunito Sans"/>
               </a:rPr>
-              <a:t>Las ideas fijas sobre cómo deben ser los chicos y las chicas en pareja son ______.  (sesión 79)</a:t>
+              <a:t>Ante una diferencia en los datos, no hay que saltar a la primera explicación: hay que preguntar ______.  (sesión 79)</a:t>
             </a:r>
           </a:p>
           <a:p>
@@ -6276,7 +6431,7 @@
                 </a:solidFill>
                 <a:latin typeface="Nunito Sans"/>
               </a:rPr>
-              <a:t>Las emociones no son buenas ni malas: son agradables o ______.  (sesión 75)</a:t>
+              <a:t>La amistad por ______ quiere el bien del otro por la persona misma.  (sesión 75)</a:t>
             </a:r>
           </a:p>
         </p:txBody>
@@ -6428,7 +6583,7 @@
                 </a:solidFill>
                 <a:latin typeface="Nunito Sans"/>
               </a:rPr>
-              <a:t>Vigilar a la pareja y presentarlo como preocupación es </a:t>
+              <a:t>Según el INE, las mujeres dedican más horas que los hombres a la casa y a </a:t>
             </a:r>
             <a:r>
               <a:rPr sz="2600" b="1">
@@ -6437,7 +6592,7 @@
                 </a:solidFill>
                 <a:latin typeface="Nunito Sans"/>
               </a:rPr>
-              <a:t>control</a:t>
+              <a:t>cuidar</a:t>
             </a:r>
             <a:r>
               <a:rPr sz="2600" b="0">
@@ -6446,7 +6601,7 @@
                 </a:solidFill>
                 <a:latin typeface="Nunito Sans"/>
               </a:rPr>
-              <a:t> disfrazado de cariño.  (sesión 79)</a:t>
+              <a:t>.  (sesión 79)</a:t>
             </a:r>
           </a:p>
           <a:p>
@@ -6471,7 +6626,7 @@
                 </a:solidFill>
                 <a:latin typeface="Nunito Sans"/>
               </a:rPr>
-              <a:t>Las ideas fijas sobre cómo deben ser los chicos y las chicas en pareja son </a:t>
+              <a:t>Ante una diferencia en los datos, no hay que saltar a la primera explicación: hay que preguntar </a:t>
             </a:r>
             <a:r>
               <a:rPr sz="2600" b="1">
@@ -6480,7 +6635,7 @@
                 </a:solidFill>
                 <a:latin typeface="Nunito Sans"/>
               </a:rPr>
-              <a:t>estereotipos</a:t>
+              <a:t>por qué</a:t>
             </a:r>
             <a:r>
               <a:rPr sz="2600" b="0">
@@ -6514,7 +6669,7 @@
                 </a:solidFill>
                 <a:latin typeface="Nunito Sans"/>
               </a:rPr>
-              <a:t>Las emociones no son buenas ni malas: son agradables o </a:t>
+              <a:t>La amistad por </a:t>
             </a:r>
             <a:r>
               <a:rPr sz="2600" b="1">
@@ -6523,7 +6678,7 @@
                 </a:solidFill>
                 <a:latin typeface="Nunito Sans"/>
               </a:rPr>
-              <a:t>desagradables</a:t>
+              <a:t>virtud</a:t>
             </a:r>
             <a:r>
               <a:rPr sz="2600" b="0">
@@ -6532,7 +6687,7 @@
                 </a:solidFill>
                 <a:latin typeface="Nunito Sans"/>
               </a:rPr>
-              <a:t>.  (sesión 75)</a:t>
+              <a:t> quiere el bien del otro por la persona misma.  (sesión 75)</a:t>
             </a:r>
           </a:p>
         </p:txBody>
@@ -6679,7 +6834,7 @@
                 </a:solidFill>
                 <a:latin typeface="Nunito Sans"/>
               </a:rPr>
-              <a:t>Un libro de texto antiguo dibuja «la familia»: un padre, una madre, un niño, una niña y un perro.</a:t>
+              <a:t>En el vestuario, después de fallar un pase, alguien grita: «¡Qué gay eres!». Todos se ríen.</a:t>
             </a:r>
           </a:p>
         </p:txBody>
@@ -6718,7 +6873,7 @@
                 </a:solidFill>
                 <a:latin typeface="Nunito Sans"/>
               </a:rPr>
-              <a:t>¿Se parece a todas las familias que conoces? ¿Qué hace que algo sea una familia?</a:t>
+              <a:t>¿Por qué funciona esa frase como insulto? ¿Qué dice sin decirlo?</a:t>
             </a:r>
           </a:p>
         </p:txBody>
@@ -6822,7 +6977,7 @@
                 </a:solidFill>
                 <a:latin typeface="Fredoka"/>
               </a:rPr>
-              <a:t>Modelos de familia</a:t>
+              <a:t>Palabras claras</a:t>
             </a:r>
           </a:p>
         </p:txBody>
@@ -6887,7 +7042,7 @@
                 </a:solidFill>
                 <a:latin typeface="Nunito Sans"/>
               </a:rPr>
-              <a:t>BLOQUE 1 · MODELOS DE FAMILIA</a:t>
+              <a:t>BLOQUE 1 · PALABRAS CLARAS</a:t>
             </a:r>
           </a:p>
         </p:txBody>
@@ -6926,7 +7081,7 @@
                 </a:solidFill>
                 <a:latin typeface="Fredoka"/>
               </a:rPr>
-              <a:t>Familia</a:t>
+              <a:t>Orientación sexual</a:t>
             </a:r>
           </a:p>
         </p:txBody>
@@ -7008,25 +7163,7 @@
                 </a:solidFill>
                 <a:latin typeface="Nunito Sans"/>
               </a:rPr>
-              <a:t>Solemos llamar </a:t>
-            </a:r>
-            <a:r>
-              <a:rPr sz="2800" b="1">
-                <a:solidFill>
-                  <a:srgbClr val="1F2A44"/>
-                </a:solidFill>
-                <a:latin typeface="Nunito Sans"/>
-              </a:rPr>
-              <a:t>familia</a:t>
-            </a:r>
-            <a:r>
-              <a:rPr sz="2800" b="1">
-                <a:solidFill>
-                  <a:srgbClr val="1F2A44"/>
-                </a:solidFill>
-                <a:latin typeface="Nunito Sans"/>
-              </a:rPr>
-              <a:t> a personas unidas por el cuidado y un vínculo duradero: parentesco, pareja, adopción o acogida.</a:t>
+              <a:t>Es hacia quién siente una persona atracción y amor.</a:t>
             </a:r>
           </a:p>
         </p:txBody>
@@ -7074,7 +7211,7 @@
                 </a:solidFill>
                 <a:latin typeface="Nunito Sans"/>
               </a:rPr>
-              <a:t>Vínculo:</a:t>
+              <a:t>Heterosexual:</a:t>
             </a:r>
             <a:r>
               <a:rPr sz="2800" b="0">
@@ -7083,7 +7220,7 @@
                 </a:solidFill>
                 <a:latin typeface="Nunito Sans"/>
               </a:rPr>
-              <a:t> una unión que dura en el tiempo</a:t>
+              <a:t> hacia personas del otro sexo</a:t>
             </a:r>
           </a:p>
           <a:p>
@@ -7108,7 +7245,7 @@
                 </a:solidFill>
                 <a:latin typeface="Nunito Sans"/>
               </a:rPr>
-              <a:t>Cuidado:</a:t>
+              <a:t>Homosexual</a:t>
             </a:r>
             <a:r>
               <a:rPr sz="2800" b="0">
@@ -7117,7 +7254,7 @@
                 </a:solidFill>
                 <a:latin typeface="Nunito Sans"/>
               </a:rPr>
-              <a:t> se ocupan unos de otros</a:t>
+              <a:t> (gay o lesbiana): hacia personas del mismo sexo</a:t>
             </a:r>
           </a:p>
           <a:p>
@@ -7136,13 +7273,56 @@
               <a:t>• </a:t>
             </a:r>
             <a:r>
+              <a:rPr sz="2800" b="1">
+                <a:solidFill>
+                  <a:srgbClr val="1F2A44"/>
+                </a:solidFill>
+                <a:latin typeface="Nunito Sans"/>
+              </a:rPr>
+              <a:t>Bisexual:</a:t>
+            </a:r>
+            <a:r>
               <a:rPr sz="2800" b="0">
                 <a:solidFill>
                   <a:srgbClr val="1F2A44"/>
                 </a:solidFill>
                 <a:latin typeface="Nunito Sans"/>
               </a:rPr>
-              <a:t>La definición exacta está discutida: esta es una forma de verlo</a:t>
+              <a:t> hacia personas de más de un sexo</a:t>
+            </a:r>
+          </a:p>
+          <a:p>
+            <a:pPr>
+              <a:spcAft>
+                <a:spcPts val="1260"/>
+              </a:spcAft>
+            </a:pPr>
+            <a:r>
+              <a:rPr sz="2800" b="1">
+                <a:solidFill>
+                  <a:srgbClr val="E8793A"/>
+                </a:solidFill>
+                <a:latin typeface="Nunito Sans"/>
+              </a:rPr>
+              <a:t>• </a:t>
+            </a:r>
+            <a:r>
+              <a:rPr sz="2800" b="0">
+                <a:solidFill>
+                  <a:srgbClr val="1F2A44"/>
+                </a:solidFill>
+                <a:latin typeface="Nunito Sans"/>
+              </a:rPr>
+              <a:t>No se elige como un gusto y </a:t>
+            </a:r>
+            <a:r>
+              <a:rPr sz="2800" b="1">
+                <a:solidFill>
+                  <a:srgbClr val="1F2A44"/>
+                </a:solidFill>
+                <a:latin typeface="Nunito Sans"/>
+              </a:rPr>
+              <a:t>no es una enfermedad</a:t>
             </a:r>
           </a:p>
         </p:txBody>
@@ -7207,7 +7387,7 @@
                 </a:solidFill>
                 <a:latin typeface="Nunito Sans"/>
               </a:rPr>
-              <a:t>BLOQUE 1 · MODELOS DE FAMILIA</a:t>
+              <a:t>BLOQUE 1 · PALABRAS CLARAS</a:t>
             </a:r>
           </a:p>
         </p:txBody>
@@ -7246,21 +7426,103 @@
                 </a:solidFill>
                 <a:latin typeface="Fredoka"/>
               </a:rPr>
-              <a:t>Algunos modelos de familia</a:t>
-            </a:r>
-          </a:p>
-        </p:txBody>
-      </p:sp>
-      <p:sp>
-        <p:nvSpPr>
-          <p:cNvPr id="4" name="TextBox 3"/>
+              <a:t>Identidad de género</a:t>
+            </a:r>
+          </a:p>
+        </p:txBody>
+      </p:sp>
+      <p:sp>
+        <p:nvSpPr>
+          <p:cNvPr id="4" name="Rectangle 3"/>
+          <p:cNvSpPr/>
+          <p:nvPr/>
+        </p:nvSpPr>
+        <p:spPr>
+          <a:xfrm>
+            <a:off x="640000" y="1650000"/>
+            <a:ext cx="10912000" cy="1150000"/>
+          </a:xfrm>
+          <a:prstGeom prst="rect">
+            <a:avLst/>
+          </a:prstGeom>
+          <a:solidFill>
+            <a:srgbClr val="EAF0F7"/>
+          </a:solidFill>
+          <a:ln>
+            <a:noFill/>
+          </a:ln>
+        </p:spPr>
+        <p:style>
+          <a:lnRef idx="1">
+            <a:schemeClr val="accent1"/>
+          </a:lnRef>
+          <a:fillRef idx="3">
+            <a:schemeClr val="accent1"/>
+          </a:fillRef>
+          <a:effectRef idx="2">
+            <a:schemeClr val="accent1"/>
+          </a:effectRef>
+          <a:fontRef idx="minor">
+            <a:schemeClr val="lt1"/>
+          </a:fontRef>
+        </p:style>
+        <p:txBody>
+          <a:bodyPr rtlCol="0" anchor="ctr"/>
+          <a:lstStyle/>
+          <a:p>
+            <a:pPr algn="ctr"/>
+          </a:p>
+        </p:txBody>
+      </p:sp>
+      <p:sp>
+        <p:nvSpPr>
+          <p:cNvPr id="5" name="TextBox 4"/>
           <p:cNvSpPr txBox="1"/>
           <p:nvPr/>
         </p:nvSpPr>
         <p:spPr>
           <a:xfrm>
-            <a:off x="640000" y="1650000"/>
-            <a:ext cx="10912000" cy="4808000"/>
+            <a:off x="840000" y="1730000"/>
+            <a:ext cx="10512000" cy="1000000"/>
+          </a:xfrm>
+          <a:prstGeom prst="rect">
+            <a:avLst/>
+          </a:prstGeom>
+          <a:noFill/>
+        </p:spPr>
+        <p:txBody>
+          <a:bodyPr wrap="square" anchor="ctr">
+            <a:spAutoFit/>
+          </a:bodyPr>
+          <a:lstStyle/>
+          <a:p>
+            <a:pPr>
+              <a:spcAft>
+                <a:spcPts val="1260"/>
+              </a:spcAft>
+            </a:pPr>
+            <a:r>
+              <a:rPr sz="2800" b="1">
+                <a:solidFill>
+                  <a:srgbClr val="1F2A44"/>
+                </a:solidFill>
+                <a:latin typeface="Nunito Sans"/>
+              </a:rPr>
+              <a:t>Es cómo se siente y se reconoce una persona: hombre, mujer u otra forma.</a:t>
+            </a:r>
+          </a:p>
+        </p:txBody>
+      </p:sp>
+      <p:sp>
+        <p:nvSpPr>
+          <p:cNvPr id="6" name="TextBox 5"/>
+          <p:cNvSpPr txBox="1"/>
+          <p:nvPr/>
+        </p:nvSpPr>
+        <p:spPr>
+          <a:xfrm>
+            <a:off x="640000" y="3000000"/>
+            <a:ext cx="10912000" cy="3458000"/>
           </a:xfrm>
           <a:prstGeom prst="rect">
             <a:avLst/>
@@ -7294,7 +7556,7 @@
                 </a:solidFill>
                 <a:latin typeface="Nunito Sans"/>
               </a:rPr>
-              <a:t>Nuclear:</a:t>
+              <a:t>Persona cis:</a:t>
             </a:r>
             <a:r>
               <a:rPr sz="2800" b="0">
@@ -7303,7 +7565,7 @@
                 </a:solidFill>
                 <a:latin typeface="Nunito Sans"/>
               </a:rPr>
-              <a:t> una madre y un padre con sus hijos</a:t>
+              <a:t> su identidad coincide con el sexo asignado al nacer</a:t>
             </a:r>
           </a:p>
           <a:p>
@@ -7328,7 +7590,7 @@
                 </a:solidFill>
                 <a:latin typeface="Nunito Sans"/>
               </a:rPr>
-              <a:t>Monoparental:</a:t>
+              <a:t>Persona trans:</a:t>
             </a:r>
             <a:r>
               <a:rPr sz="2800" b="0">
@@ -7337,7 +7599,7 @@
                 </a:solidFill>
                 <a:latin typeface="Nunito Sans"/>
               </a:rPr>
-              <a:t> una madre o un padre solo con sus hijos</a:t>
+              <a:t> su identidad no coincide con el sexo asignado al nacer</a:t>
             </a:r>
           </a:p>
           <a:p>
@@ -7356,117 +7618,22 @@
               <a:t>• </a:t>
             </a:r>
             <a:r>
+              <a:rPr sz="2800" b="0">
+                <a:solidFill>
+                  <a:srgbClr val="1F2A44"/>
+                </a:solidFill>
+                <a:latin typeface="Nunito Sans"/>
+              </a:rPr>
+              <a:t>Orientación e identidad son </a:t>
+            </a:r>
+            <a:r>
               <a:rPr sz="2800" b="1">
                 <a:solidFill>
                   <a:srgbClr val="1F2A44"/>
                 </a:solidFill>
                 <a:latin typeface="Nunito Sans"/>
               </a:rPr>
-              <a:t>Reconstituida:</a:t>
-            </a:r>
-            <a:r>
-              <a:rPr sz="2800" b="0">
-                <a:solidFill>
-                  <a:srgbClr val="1F2A44"/>
-                </a:solidFill>
-                <a:latin typeface="Nunito Sans"/>
-              </a:rPr>
-              <a:t> una pareja con hijos de relaciones anteriores</a:t>
-            </a:r>
-          </a:p>
-          <a:p>
-            <a:pPr>
-              <a:spcAft>
-                <a:spcPts val="1260"/>
-              </a:spcAft>
-            </a:pPr>
-            <a:r>
-              <a:rPr sz="2800" b="1">
-                <a:solidFill>
-                  <a:srgbClr val="E8793A"/>
-                </a:solidFill>
-                <a:latin typeface="Nunito Sans"/>
-              </a:rPr>
-              <a:t>• </a:t>
-            </a:r>
-            <a:r>
-              <a:rPr sz="2800" b="1">
-                <a:solidFill>
-                  <a:srgbClr val="1F2A44"/>
-                </a:solidFill>
-                <a:latin typeface="Nunito Sans"/>
-              </a:rPr>
-              <a:t>Homoparental:</a:t>
-            </a:r>
-            <a:r>
-              <a:rPr sz="2800" b="0">
-                <a:solidFill>
-                  <a:srgbClr val="1F2A44"/>
-                </a:solidFill>
-                <a:latin typeface="Nunito Sans"/>
-              </a:rPr>
-              <a:t> dos madres o dos padres; en España, matrimonio legal desde 2005</a:t>
-            </a:r>
-          </a:p>
-          <a:p>
-            <a:pPr>
-              <a:spcAft>
-                <a:spcPts val="1260"/>
-              </a:spcAft>
-            </a:pPr>
-            <a:r>
-              <a:rPr sz="2800" b="1">
-                <a:solidFill>
-                  <a:srgbClr val="E8793A"/>
-                </a:solidFill>
-                <a:latin typeface="Nunito Sans"/>
-              </a:rPr>
-              <a:t>• </a:t>
-            </a:r>
-            <a:r>
-              <a:rPr sz="2800" b="0">
-                <a:solidFill>
-                  <a:srgbClr val="1F2A44"/>
-                </a:solidFill>
-                <a:latin typeface="Nunito Sans"/>
-              </a:rPr>
-              <a:t>Y también: </a:t>
-            </a:r>
-            <a:r>
-              <a:rPr sz="2800" b="1">
-                <a:solidFill>
-                  <a:srgbClr val="1F2A44"/>
-                </a:solidFill>
-                <a:latin typeface="Nunito Sans"/>
-              </a:rPr>
-              <a:t>extensa</a:t>
-            </a:r>
-            <a:r>
-              <a:rPr sz="2800" b="0">
-                <a:solidFill>
-                  <a:srgbClr val="1F2A44"/>
-                </a:solidFill>
-                <a:latin typeface="Nunito Sans"/>
-              </a:rPr>
-              <a:t> (con abuelos, tíos…), </a:t>
-            </a:r>
-            <a:r>
-              <a:rPr sz="2800" b="1">
-                <a:solidFill>
-                  <a:srgbClr val="1F2A44"/>
-                </a:solidFill>
-                <a:latin typeface="Nunito Sans"/>
-              </a:rPr>
-              <a:t>de acogida</a:t>
-            </a:r>
-            <a:r>
-              <a:rPr sz="2800" b="0">
-                <a:solidFill>
-                  <a:srgbClr val="1F2A44"/>
-                </a:solidFill>
-                <a:latin typeface="Nunito Sans"/>
-              </a:rPr>
-              <a:t>, sin hijos…</a:t>
+              <a:t>cosas distintas</a:t>
             </a:r>
           </a:p>
         </p:txBody>
@@ -7531,7 +7698,7 @@
                 </a:solidFill>
                 <a:latin typeface="Nunito Sans"/>
               </a:rPr>
-              <a:t>BLOQUE 1 · MODELOS DE FAMILIA</a:t>
+              <a:t>BLOQUE 1 · PALABRAS CLARAS</a:t>
             </a:r>
           </a:p>
         </p:txBody>
@@ -7570,21 +7737,121 @@
                 </a:solidFill>
                 <a:latin typeface="Fredoka"/>
               </a:rPr>
-              <a:t>¿Qué tienen en común?</a:t>
-            </a:r>
-          </a:p>
-        </p:txBody>
-      </p:sp>
-      <p:sp>
-        <p:nvSpPr>
-          <p:cNvPr id="4" name="TextBox 3"/>
+              <a:t>Consentimiento</a:t>
+            </a:r>
+          </a:p>
+        </p:txBody>
+      </p:sp>
+      <p:sp>
+        <p:nvSpPr>
+          <p:cNvPr id="4" name="Rectangle 3"/>
+          <p:cNvSpPr/>
+          <p:nvPr/>
+        </p:nvSpPr>
+        <p:spPr>
+          <a:xfrm>
+            <a:off x="640000" y="1650000"/>
+            <a:ext cx="10912000" cy="1150000"/>
+          </a:xfrm>
+          <a:prstGeom prst="rect">
+            <a:avLst/>
+          </a:prstGeom>
+          <a:solidFill>
+            <a:srgbClr val="EAF0F7"/>
+          </a:solidFill>
+          <a:ln>
+            <a:noFill/>
+          </a:ln>
+        </p:spPr>
+        <p:style>
+          <a:lnRef idx="1">
+            <a:schemeClr val="accent1"/>
+          </a:lnRef>
+          <a:fillRef idx="3">
+            <a:schemeClr val="accent1"/>
+          </a:fillRef>
+          <a:effectRef idx="2">
+            <a:schemeClr val="accent1"/>
+          </a:effectRef>
+          <a:fontRef idx="minor">
+            <a:schemeClr val="lt1"/>
+          </a:fontRef>
+        </p:style>
+        <p:txBody>
+          <a:bodyPr rtlCol="0" anchor="ctr"/>
+          <a:lstStyle/>
+          <a:p>
+            <a:pPr algn="ctr"/>
+          </a:p>
+        </p:txBody>
+      </p:sp>
+      <p:sp>
+        <p:nvSpPr>
+          <p:cNvPr id="5" name="TextBox 4"/>
           <p:cNvSpPr txBox="1"/>
           <p:nvPr/>
         </p:nvSpPr>
         <p:spPr>
           <a:xfrm>
-            <a:off x="640000" y="1650000"/>
-            <a:ext cx="10912000" cy="4808000"/>
+            <a:off x="840000" y="1730000"/>
+            <a:ext cx="10512000" cy="1000000"/>
+          </a:xfrm>
+          <a:prstGeom prst="rect">
+            <a:avLst/>
+          </a:prstGeom>
+          <a:noFill/>
+        </p:spPr>
+        <p:txBody>
+          <a:bodyPr wrap="square" anchor="ctr">
+            <a:spAutoFit/>
+          </a:bodyPr>
+          <a:lstStyle/>
+          <a:p>
+            <a:pPr>
+              <a:spcAft>
+                <a:spcPts val="1260"/>
+              </a:spcAft>
+            </a:pPr>
+            <a:r>
+              <a:rPr sz="2800" b="1">
+                <a:solidFill>
+                  <a:srgbClr val="1F2A44"/>
+                </a:solidFill>
+                <a:latin typeface="Nunito Sans"/>
+              </a:rPr>
+              <a:t>Es estar de acuerdo con algo de forma libre y clara. En las relaciones, </a:t>
+            </a:r>
+            <a:r>
+              <a:rPr sz="2800" b="1">
+                <a:solidFill>
+                  <a:srgbClr val="1F2A44"/>
+                </a:solidFill>
+                <a:latin typeface="Nunito Sans"/>
+              </a:rPr>
+              <a:t>solo sí es sí</a:t>
+            </a:r>
+            <a:r>
+              <a:rPr sz="2800" b="1">
+                <a:solidFill>
+                  <a:srgbClr val="1F2A44"/>
+                </a:solidFill>
+                <a:latin typeface="Nunito Sans"/>
+              </a:rPr>
+              <a:t>.</a:t>
+            </a:r>
+          </a:p>
+        </p:txBody>
+      </p:sp>
+      <p:sp>
+        <p:nvSpPr>
+          <p:cNvPr id="6" name="TextBox 5"/>
+          <p:cNvSpPr txBox="1"/>
+          <p:nvPr/>
+        </p:nvSpPr>
+        <p:spPr>
+          <a:xfrm>
+            <a:off x="640000" y="3000000"/>
+            <a:ext cx="10912000" cy="3458000"/>
           </a:xfrm>
           <a:prstGeom prst="rect">
             <a:avLst/>
@@ -7612,13 +7879,22 @@
               <a:t>• </a:t>
             </a:r>
             <a:r>
+              <a:rPr sz="2800" b="0">
+                <a:solidFill>
+                  <a:srgbClr val="1F2A44"/>
+                </a:solidFill>
+                <a:latin typeface="Nunito Sans"/>
+              </a:rPr>
+              <a:t>Callarse o no decir «no» </a:t>
+            </a:r>
+            <a:r>
               <a:rPr sz="2800" b="1">
                 <a:solidFill>
                   <a:srgbClr val="1F2A44"/>
                 </a:solidFill>
                 <a:latin typeface="Nunito Sans"/>
               </a:rPr>
-              <a:t>Cuidado:</a:t>
+              <a:t>no</a:t>
             </a:r>
             <a:r>
               <a:rPr sz="2800" b="0">
@@ -7627,7 +7903,7 @@
                 </a:solidFill>
                 <a:latin typeface="Nunito Sans"/>
               </a:rPr>
-              <a:t> alguien se ocupa de ti: comida, salud, estudios, cariño</a:t>
+              <a:t> es un sí</a:t>
             </a:r>
           </a:p>
           <a:p>
@@ -7646,13 +7922,38 @@
               <a:t>• </a:t>
             </a:r>
             <a:r>
+              <a:rPr sz="2800" b="0">
+                <a:solidFill>
+                  <a:srgbClr val="1F2A44"/>
+                </a:solidFill>
+                <a:latin typeface="Nunito Sans"/>
+              </a:rPr>
+              <a:t>Con presión, miedo o engaño no hay acuerdo </a:t>
+            </a:r>
+            <a:r>
               <a:rPr sz="2800" b="1">
                 <a:solidFill>
                   <a:srgbClr val="1F2A44"/>
                 </a:solidFill>
                 <a:latin typeface="Nunito Sans"/>
               </a:rPr>
-              <a:t>Vínculo:</a:t>
+              <a:t>libre</a:t>
+            </a:r>
+          </a:p>
+          <a:p>
+            <a:pPr>
+              <a:spcAft>
+                <a:spcPts val="1260"/>
+              </a:spcAft>
+            </a:pPr>
+            <a:r>
+              <a:rPr sz="2800" b="1">
+                <a:solidFill>
+                  <a:srgbClr val="E8793A"/>
+                </a:solidFill>
+                <a:latin typeface="Nunito Sans"/>
+              </a:rPr>
+              <a:t>• </a:t>
             </a:r>
             <a:r>
               <a:rPr sz="2800" b="0">
@@ -7661,7 +7962,25 @@
                 </a:solidFill>
                 <a:latin typeface="Nunito Sans"/>
               </a:rPr>
-              <a:t> una relación que dura en el tiempo</a:t>
+              <a:t>Se puede </a:t>
+            </a:r>
+            <a:r>
+              <a:rPr sz="2800" b="1">
+                <a:solidFill>
+                  <a:srgbClr val="1F2A44"/>
+                </a:solidFill>
+                <a:latin typeface="Nunito Sans"/>
+              </a:rPr>
+              <a:t>cambiar de opinión</a:t>
+            </a:r>
+            <a:r>
+              <a:rPr sz="2800" b="0">
+                <a:solidFill>
+                  <a:srgbClr val="1F2A44"/>
+                </a:solidFill>
+                <a:latin typeface="Nunito Sans"/>
+              </a:rPr>
+              <a:t> en cualquier momento</a:t>
             </a:r>
           </a:p>
           <a:p>
@@ -7680,65 +7999,22 @@
               <a:t>• </a:t>
             </a:r>
             <a:r>
+              <a:rPr sz="2800" b="0">
+                <a:solidFill>
+                  <a:srgbClr val="1F2A44"/>
+                </a:solidFill>
+                <a:latin typeface="Nunito Sans"/>
+              </a:rPr>
+              <a:t>Vale para un beso, un abrazo o </a:t>
+            </a:r>
+            <a:r>
               <a:rPr sz="2800" b="1">
                 <a:solidFill>
                   <a:srgbClr val="1F2A44"/>
                 </a:solidFill>
                 <a:latin typeface="Nunito Sans"/>
               </a:rPr>
-              <a:t>Conflictos:</a:t>
-            </a:r>
-            <a:r>
-              <a:rPr sz="2800" b="0">
-                <a:solidFill>
-                  <a:srgbClr val="1F2A44"/>
-                </a:solidFill>
-                <a:latin typeface="Nunito Sans"/>
-              </a:rPr>
-              <a:t> en todas se discute, se negocian normas y se hacen las paces</a:t>
-            </a:r>
-          </a:p>
-          <a:p>
-            <a:pPr>
-              <a:spcAft>
-                <a:spcPts val="1260"/>
-              </a:spcAft>
-            </a:pPr>
-            <a:r>
-              <a:rPr sz="2800" b="1">
-                <a:solidFill>
-                  <a:srgbClr val="E8793A"/>
-                </a:solidFill>
-                <a:latin typeface="Nunito Sans"/>
-              </a:rPr>
-              <a:t>• </a:t>
-            </a:r>
-            <a:r>
-              <a:rPr sz="2800" b="0">
-                <a:solidFill>
-                  <a:srgbClr val="1F2A44"/>
-                </a:solidFill>
-                <a:latin typeface="Nunito Sans"/>
-              </a:rPr>
-              <a:t>La forma cambia; lo que cuenta es </a:t>
-            </a:r>
-            <a:r>
-              <a:rPr sz="2800" b="1">
-                <a:solidFill>
-                  <a:srgbClr val="1F2A44"/>
-                </a:solidFill>
-                <a:latin typeface="Nunito Sans"/>
-              </a:rPr>
-              <a:t>cómo</a:t>
-            </a:r>
-            <a:r>
-              <a:rPr sz="2800" b="0">
-                <a:solidFill>
-                  <a:srgbClr val="1F2A44"/>
-                </a:solidFill>
-                <a:latin typeface="Nunito Sans"/>
-              </a:rPr>
-              <a:t> se tratan</a:t>
+              <a:t>una foto</a:t>
             </a:r>
           </a:p>
         </p:txBody>
@@ -7757,7 +8033,7 @@
     <p:bg>
       <p:bgPr>
         <a:solidFill>
-          <a:srgbClr val="1F2A44"/>
+          <a:srgbClr val="FBF7EF"/>
         </a:solidFill>
         <a:effectLst/>
       </p:bgPr>
@@ -7777,8 +8053,8 @@
         </p:nvSpPr>
         <p:spPr>
           <a:xfrm>
-            <a:off x="640000" y="2300000"/>
-            <a:ext cx="10912000" cy="500000"/>
+            <a:off x="640000" y="380000"/>
+            <a:ext cx="10912000" cy="420000"/>
           </a:xfrm>
           <a:prstGeom prst="rect">
             <a:avLst/>
@@ -7793,17 +8069,17 @@
           <a:p>
             <a:pPr>
               <a:spcAft>
-                <a:spcPts val="810"/>
-              </a:spcAft>
-            </a:pPr>
-            <a:r>
-              <a:rPr sz="1800" b="1">
-                <a:solidFill>
-                  <a:srgbClr val="F4B183"/>
-                </a:solidFill>
-                <a:latin typeface="Nunito Sans"/>
-              </a:rPr>
-              <a:t>BLOQUE 2</a:t>
+                <a:spcPts val="630"/>
+              </a:spcAft>
+            </a:pPr>
+            <a:r>
+              <a:rPr sz="1400" b="1">
+                <a:solidFill>
+                  <a:srgbClr val="E8793A"/>
+                </a:solidFill>
+                <a:latin typeface="Nunito Sans"/>
+              </a:rPr>
+              <a:t>BLOQUE 1 · PALABRAS CLARAS</a:t>
             </a:r>
           </a:p>
         </p:txBody>
@@ -7816,7 +8092,7 @@
         </p:nvSpPr>
         <p:spPr>
           <a:xfrm>
-            <a:off x="640000" y="2800000"/>
+            <a:off x="640000" y="760000"/>
             <a:ext cx="10912000" cy="800000"/>
           </a:xfrm>
           <a:prstGeom prst="rect">
@@ -7832,17 +8108,240 @@
           <a:p>
             <a:pPr>
               <a:spcAft>
-                <a:spcPts val="2160"/>
-              </a:spcAft>
-            </a:pPr>
-            <a:r>
-              <a:rPr sz="4800" b="1">
-                <a:solidFill>
-                  <a:srgbClr val="FBF7EF"/>
+                <a:spcPts val="1710"/>
+              </a:spcAft>
+            </a:pPr>
+            <a:r>
+              <a:rPr sz="3800" b="1">
+                <a:solidFill>
+                  <a:srgbClr val="1F2A44"/>
                 </a:solidFill>
                 <a:latin typeface="Fredoka"/>
               </a:rPr>
-              <a:t>Casos resueltos</a:t>
+              <a:t>Caso 1 · La foto</a:t>
+            </a:r>
+          </a:p>
+        </p:txBody>
+      </p:sp>
+      <p:sp>
+        <p:nvSpPr>
+          <p:cNvPr id="4" name="Rectangle 3"/>
+          <p:cNvSpPr/>
+          <p:nvPr/>
+        </p:nvSpPr>
+        <p:spPr>
+          <a:xfrm>
+            <a:off x="640000" y="1600000"/>
+            <a:ext cx="10912000" cy="1100000"/>
+          </a:xfrm>
+          <a:prstGeom prst="rect">
+            <a:avLst/>
+          </a:prstGeom>
+          <a:solidFill>
+            <a:srgbClr val="FFFFFF"/>
+          </a:solidFill>
+          <a:ln>
+            <a:noFill/>
+          </a:ln>
+        </p:spPr>
+        <p:style>
+          <a:lnRef idx="1">
+            <a:schemeClr val="accent1"/>
+          </a:lnRef>
+          <a:fillRef idx="3">
+            <a:schemeClr val="accent1"/>
+          </a:fillRef>
+          <a:effectRef idx="2">
+            <a:schemeClr val="accent1"/>
+          </a:effectRef>
+          <a:fontRef idx="minor">
+            <a:schemeClr val="lt1"/>
+          </a:fontRef>
+        </p:style>
+        <p:txBody>
+          <a:bodyPr rtlCol="0" anchor="ctr"/>
+          <a:lstStyle/>
+          <a:p>
+            <a:pPr algn="ctr"/>
+          </a:p>
+        </p:txBody>
+      </p:sp>
+      <p:sp>
+        <p:nvSpPr>
+          <p:cNvPr id="5" name="TextBox 4"/>
+          <p:cNvSpPr txBox="1"/>
+          <p:nvPr/>
+        </p:nvSpPr>
+        <p:spPr>
+          <a:xfrm>
+            <a:off x="840000" y="1650000"/>
+            <a:ext cx="10512000" cy="1000000"/>
+          </a:xfrm>
+          <a:prstGeom prst="rect">
+            <a:avLst/>
+          </a:prstGeom>
+          <a:noFill/>
+        </p:spPr>
+        <p:txBody>
+          <a:bodyPr wrap="square" anchor="ctr">
+            <a:spAutoFit/>
+          </a:bodyPr>
+          <a:lstStyle/>
+          <a:p>
+            <a:pPr>
+              <a:spcAft>
+                <a:spcPts val="1170"/>
+              </a:spcAft>
+            </a:pPr>
+            <a:r>
+              <a:rPr sz="2600" b="1">
+                <a:solidFill>
+                  <a:srgbClr val="1F2A44"/>
+                </a:solidFill>
+                <a:latin typeface="Nunito Sans"/>
+              </a:rPr>
+              <a:t>Una chica le envió una foto privada a un chico cuando salían juntos. Ahora lo han dejado y él quiere reenviarla al grupo de la cuadrilla.</a:t>
+            </a:r>
+          </a:p>
+        </p:txBody>
+      </p:sp>
+      <p:sp>
+        <p:nvSpPr>
+          <p:cNvPr id="6" name="TextBox 5"/>
+          <p:cNvSpPr txBox="1"/>
+          <p:nvPr/>
+        </p:nvSpPr>
+        <p:spPr>
+          <a:xfrm>
+            <a:off x="640000" y="2900000"/>
+            <a:ext cx="10912000" cy="3500000"/>
+          </a:xfrm>
+          <a:prstGeom prst="rect">
+            <a:avLst/>
+          </a:prstGeom>
+          <a:noFill/>
+        </p:spPr>
+        <p:txBody>
+          <a:bodyPr wrap="square">
+            <a:spAutoFit/>
+          </a:bodyPr>
+          <a:lstStyle/>
+          <a:p>
+            <a:pPr>
+              <a:spcAft>
+                <a:spcPts val="1080"/>
+              </a:spcAft>
+            </a:pPr>
+            <a:r>
+              <a:rPr sz="2400" b="1">
+                <a:solidFill>
+                  <a:srgbClr val="E8793A"/>
+                </a:solidFill>
+                <a:latin typeface="Nunito Sans"/>
+              </a:rPr>
+              <a:t>1. </a:t>
+            </a:r>
+            <a:r>
+              <a:rPr sz="2400" b="0">
+                <a:solidFill>
+                  <a:srgbClr val="1F2A44"/>
+                </a:solidFill>
+                <a:latin typeface="Nunito Sans"/>
+              </a:rPr>
+              <a:t>¿Dio ella permiso para que la vieran otros? No: la envió solo a él.</a:t>
+            </a:r>
+          </a:p>
+          <a:p>
+            <a:pPr>
+              <a:spcAft>
+                <a:spcPts val="1080"/>
+              </a:spcAft>
+            </a:pPr>
+            <a:r>
+              <a:rPr sz="2400" b="1">
+                <a:solidFill>
+                  <a:srgbClr val="E8793A"/>
+                </a:solidFill>
+                <a:latin typeface="Nunito Sans"/>
+              </a:rPr>
+              <a:t>2. </a:t>
+            </a:r>
+            <a:r>
+              <a:rPr sz="2400" b="0">
+                <a:solidFill>
+                  <a:srgbClr val="1F2A44"/>
+                </a:solidFill>
+                <a:latin typeface="Nunito Sans"/>
+              </a:rPr>
+              <a:t>El consentimiento es para una cosa concreta. Enviar una foto no es aceptar que se reenvíe.</a:t>
+            </a:r>
+          </a:p>
+          <a:p>
+            <a:pPr>
+              <a:spcAft>
+                <a:spcPts val="1080"/>
+              </a:spcAft>
+            </a:pPr>
+            <a:r>
+              <a:rPr sz="2400" b="1">
+                <a:solidFill>
+                  <a:srgbClr val="E8793A"/>
+                </a:solidFill>
+                <a:latin typeface="Nunito Sans"/>
+              </a:rPr>
+              <a:t>3. </a:t>
+            </a:r>
+            <a:r>
+              <a:rPr sz="2400" b="0">
+                <a:solidFill>
+                  <a:srgbClr val="1F2A44"/>
+                </a:solidFill>
+                <a:latin typeface="Nunito Sans"/>
+              </a:rPr>
+              <a:t>Además, difundir imágenes privadas sin permiso puede ser </a:t>
+            </a:r>
+            <a:r>
+              <a:rPr sz="2400" b="1">
+                <a:solidFill>
+                  <a:srgbClr val="1F2A44"/>
+                </a:solidFill>
+                <a:latin typeface="Nunito Sans"/>
+              </a:rPr>
+              <a:t>delito</a:t>
+            </a:r>
+            <a:r>
+              <a:rPr sz="2400" b="0">
+                <a:solidFill>
+                  <a:srgbClr val="1F2A44"/>
+                </a:solidFill>
+                <a:latin typeface="Nunito Sans"/>
+              </a:rPr>
+              <a:t> en España.</a:t>
+            </a:r>
+          </a:p>
+          <a:p>
+            <a:pPr>
+              <a:spcAft>
+                <a:spcPts val="1080"/>
+              </a:spcAft>
+            </a:pPr>
+            <a:r>
+              <a:rPr sz="2400" b="1">
+                <a:solidFill>
+                  <a:srgbClr val="E8793A"/>
+                </a:solidFill>
+                <a:latin typeface="Nunito Sans"/>
+              </a:rPr>
+              <a:t>4. </a:t>
+            </a:r>
+            <a:r>
+              <a:rPr sz="2400" b="0">
+                <a:solidFill>
+                  <a:srgbClr val="1F2A44"/>
+                </a:solidFill>
+                <a:latin typeface="Nunito Sans"/>
+              </a:rPr>
+              <a:t>Conclusión: sin un sí claro de ella, no se reenvía. Y ella puede cambiar de opinión.</a:t>
             </a:r>
           </a:p>
         </p:txBody>
